--- a/docs/test/stress/m3-challenger-output/a24_compliant_16r.pptx
+++ b/docs/test/stress/m3-challenger-output/a24_compliant_16r.pptx
@@ -1016,14 +1016,39 @@
       </p:sp>
       <p:sp>
         <p:nvSpPr>
-          <p:cNvPr id="6" name="Text 4"/>
+          <p:cNvPr id="6" name="Shape 4"/>
           <p:cNvSpPr/>
           <p:nvPr/>
         </p:nvSpPr>
         <p:spPr>
           <a:xfrm>
-            <a:off x="566928" y="5961888"/>
-            <a:ext cx="3108960" cy="182880"/>
+            <a:off x="566928" y="1645920"/>
+            <a:ext cx="2011680" cy="259259"/>
+          </a:xfrm>
+          <a:prstGeom prst="rect">
+            <a:avLst/>
+          </a:prstGeom>
+          <a:solidFill>
+            <a:srgbClr val="10161F"/>
+          </a:solidFill>
+          <a:ln w="6350">
+            <a:solidFill>
+              <a:srgbClr val="10161F"/>
+            </a:solidFill>
+            <a:prstDash val="solid"/>
+          </a:ln>
+        </p:spPr>
+      </p:sp>
+      <p:sp>
+        <p:nvSpPr>
+          <p:cNvPr id="7" name="Text 5"/>
+          <p:cNvSpPr/>
+          <p:nvPr/>
+        </p:nvSpPr>
+        <p:spPr>
+          <a:xfrm>
+            <a:off x="566928" y="1645920"/>
+            <a:ext cx="2011680" cy="259259"/>
           </a:xfrm>
           <a:prstGeom prst="rect">
             <a:avLst/>
@@ -1032,24 +1057,1672 @@
           <a:ln/>
         </p:spPr>
         <p:txBody>
-          <a:bodyPr wrap="square" lIns="0" tIns="0" rIns="0" bIns="0" rtlCol="0" anchor="ctr"/>
+          <a:bodyPr wrap="none" lIns="0" tIns="0" rIns="0" bIns="0" rtlCol="0" anchor="ctr"/>
           <a:lstStyle/>
           <a:p>
-            <a:pPr algn="l" indent="0" marL="0">
+            <a:pPr algn="ctr" indent="0" marL="0">
               <a:buNone/>
             </a:pPr>
             <a:r>
-              <a:rPr lang="en-US" sz="850" dirty="0">
+              <a:rPr lang="en-US" sz="850" b="1" dirty="0">
                 <a:solidFill>
-                  <a:srgbClr val="8A8A8A"/>
+                  <a:srgbClr val="FFFFFF"/>
                 </a:solidFill>
                 <a:latin typeface="맑은 고딕" pitchFamily="34" charset="0"/>
                 <a:ea typeface="맑은 고딕" pitchFamily="34" charset="-122"/>
                 <a:cs typeface="맑은 고딕" pitchFamily="34" charset="-120"/>
               </a:rPr>
-              <a:t>※ 렌트롤 현황 기준 층별 공간 배치도</a:t>
+              <a:t>층별 스태킹 플랜 (㎡)</a:t>
             </a:r>
             <a:endParaRPr lang="en-US" sz="850" dirty="0"/>
+          </a:p>
+        </p:txBody>
+      </p:sp>
+      <p:sp>
+        <p:nvSpPr>
+          <p:cNvPr id="8" name="Text 6"/>
+          <p:cNvSpPr/>
+          <p:nvPr/>
+        </p:nvSpPr>
+        <p:spPr>
+          <a:xfrm>
+            <a:off x="566928" y="5534809"/>
+            <a:ext cx="475488" cy="259259"/>
+          </a:xfrm>
+          <a:prstGeom prst="rect">
+            <a:avLst/>
+          </a:prstGeom>
+          <a:noFill/>
+          <a:ln/>
+        </p:spPr>
+        <p:txBody>
+          <a:bodyPr wrap="none" lIns="0" tIns="0" rIns="0" bIns="0" rtlCol="0" anchor="ctr"/>
+          <a:lstStyle/>
+          <a:p>
+            <a:pPr algn="r" indent="0" marL="0">
+              <a:buNone/>
+            </a:pPr>
+            <a:r>
+              <a:rPr lang="en-US" sz="800" b="1" dirty="0">
+                <a:solidFill>
+                  <a:srgbClr val="10161F"/>
+                </a:solidFill>
+                <a:latin typeface="맑은 고딕" pitchFamily="34" charset="0"/>
+                <a:ea typeface="맑은 고딕" pitchFamily="34" charset="-122"/>
+                <a:cs typeface="맑은 고딕" pitchFamily="34" charset="-120"/>
+              </a:rPr>
+              <a:t>1F</a:t>
+            </a:r>
+            <a:endParaRPr lang="en-US" sz="800" dirty="0"/>
+          </a:p>
+        </p:txBody>
+      </p:sp>
+      <p:sp>
+        <p:nvSpPr>
+          <p:cNvPr id="9" name="Shape 7"/>
+          <p:cNvSpPr/>
+          <p:nvPr/>
+        </p:nvSpPr>
+        <p:spPr>
+          <a:xfrm>
+            <a:off x="1115568" y="5566813"/>
+            <a:ext cx="1444752" cy="195251"/>
+          </a:xfrm>
+          <a:prstGeom prst="rect">
+            <a:avLst/>
+          </a:prstGeom>
+          <a:solidFill>
+            <a:srgbClr val="C5B4E3"/>
+          </a:solidFill>
+          <a:ln w="9525">
+            <a:solidFill>
+              <a:srgbClr val="5B6B73"/>
+            </a:solidFill>
+            <a:prstDash val="solid"/>
+          </a:ln>
+        </p:spPr>
+      </p:sp>
+      <p:sp>
+        <p:nvSpPr>
+          <p:cNvPr id="10" name="Text 8"/>
+          <p:cNvSpPr/>
+          <p:nvPr/>
+        </p:nvSpPr>
+        <p:spPr>
+          <a:xfrm>
+            <a:off x="1143000" y="5566813"/>
+            <a:ext cx="1389888" cy="195251"/>
+          </a:xfrm>
+          <a:prstGeom prst="rect">
+            <a:avLst/>
+          </a:prstGeom>
+          <a:noFill/>
+          <a:ln/>
+        </p:spPr>
+        <p:txBody>
+          <a:bodyPr wrap="none" lIns="0" tIns="0" rIns="0" bIns="0" rtlCol="0" anchor="ctr"/>
+          <a:lstStyle/>
+          <a:p>
+            <a:pPr algn="ctr" indent="0" marL="0">
+              <a:buNone/>
+            </a:pPr>
+            <a:r>
+              <a:rPr lang="en-US" sz="750" dirty="0">
+                <a:solidFill>
+                  <a:srgbClr val="3A3A3A"/>
+                </a:solidFill>
+                <a:latin typeface="맑은 고딕" pitchFamily="34" charset="0"/>
+                <a:ea typeface="맑은 고딕" pitchFamily="34" charset="-122"/>
+                <a:cs typeface="맑은 고딕" pitchFamily="34" charset="-120"/>
+              </a:rPr>
+              <a:t>스타벅스코리아리저브DT점</a:t>
+            </a:r>
+            <a:endParaRPr lang="en-US" sz="750" dirty="0"/>
+          </a:p>
+        </p:txBody>
+      </p:sp>
+      <p:sp>
+        <p:nvSpPr>
+          <p:cNvPr id="11" name="Text 9"/>
+          <p:cNvSpPr/>
+          <p:nvPr/>
+        </p:nvSpPr>
+        <p:spPr>
+          <a:xfrm>
+            <a:off x="566928" y="5275550"/>
+            <a:ext cx="475488" cy="259259"/>
+          </a:xfrm>
+          <a:prstGeom prst="rect">
+            <a:avLst/>
+          </a:prstGeom>
+          <a:noFill/>
+          <a:ln/>
+        </p:spPr>
+        <p:txBody>
+          <a:bodyPr wrap="none" lIns="0" tIns="0" rIns="0" bIns="0" rtlCol="0" anchor="ctr"/>
+          <a:lstStyle/>
+          <a:p>
+            <a:pPr algn="r" indent="0" marL="0">
+              <a:buNone/>
+            </a:pPr>
+            <a:r>
+              <a:rPr lang="en-US" sz="800" b="1" dirty="0">
+                <a:solidFill>
+                  <a:srgbClr val="10161F"/>
+                </a:solidFill>
+                <a:latin typeface="맑은 고딕" pitchFamily="34" charset="0"/>
+                <a:ea typeface="맑은 고딕" pitchFamily="34" charset="-122"/>
+                <a:cs typeface="맑은 고딕" pitchFamily="34" charset="-120"/>
+              </a:rPr>
+              <a:t>2F</a:t>
+            </a:r>
+            <a:endParaRPr lang="en-US" sz="800" dirty="0"/>
+          </a:p>
+        </p:txBody>
+      </p:sp>
+      <p:sp>
+        <p:nvSpPr>
+          <p:cNvPr id="12" name="Shape 10"/>
+          <p:cNvSpPr/>
+          <p:nvPr/>
+        </p:nvSpPr>
+        <p:spPr>
+          <a:xfrm>
+            <a:off x="1115568" y="5307554"/>
+            <a:ext cx="1444752" cy="195251"/>
+          </a:xfrm>
+          <a:prstGeom prst="rect">
+            <a:avLst/>
+          </a:prstGeom>
+          <a:solidFill>
+            <a:srgbClr val="C5B4E3"/>
+          </a:solidFill>
+          <a:ln w="9525">
+            <a:solidFill>
+              <a:srgbClr val="5B6B73"/>
+            </a:solidFill>
+            <a:prstDash val="solid"/>
+          </a:ln>
+        </p:spPr>
+      </p:sp>
+      <p:sp>
+        <p:nvSpPr>
+          <p:cNvPr id="13" name="Text 11"/>
+          <p:cNvSpPr/>
+          <p:nvPr/>
+        </p:nvSpPr>
+        <p:spPr>
+          <a:xfrm>
+            <a:off x="1143000" y="5307554"/>
+            <a:ext cx="1389888" cy="195251"/>
+          </a:xfrm>
+          <a:prstGeom prst="rect">
+            <a:avLst/>
+          </a:prstGeom>
+          <a:noFill/>
+          <a:ln/>
+        </p:spPr>
+        <p:txBody>
+          <a:bodyPr wrap="none" lIns="0" tIns="0" rIns="0" bIns="0" rtlCol="0" anchor="ctr"/>
+          <a:lstStyle/>
+          <a:p>
+            <a:pPr algn="ctr" indent="0" marL="0">
+              <a:buNone/>
+            </a:pPr>
+            <a:r>
+              <a:rPr lang="en-US" sz="700" dirty="0">
+                <a:solidFill>
+                  <a:srgbClr val="3A3A3A"/>
+                </a:solidFill>
+                <a:latin typeface="맑은 고딕" pitchFamily="34" charset="0"/>
+                <a:ea typeface="맑은 고딕" pitchFamily="34" charset="-122"/>
+                <a:cs typeface="맑은 고딕" pitchFamily="34" charset="-120"/>
+              </a:rPr>
+              <a:t>한국글로벌자산운용_2층_사업단</a:t>
+            </a:r>
+            <a:endParaRPr lang="en-US" sz="700" dirty="0"/>
+          </a:p>
+        </p:txBody>
+      </p:sp>
+      <p:sp>
+        <p:nvSpPr>
+          <p:cNvPr id="14" name="Text 12"/>
+          <p:cNvSpPr/>
+          <p:nvPr/>
+        </p:nvSpPr>
+        <p:spPr>
+          <a:xfrm>
+            <a:off x="566928" y="5016291"/>
+            <a:ext cx="475488" cy="259259"/>
+          </a:xfrm>
+          <a:prstGeom prst="rect">
+            <a:avLst/>
+          </a:prstGeom>
+          <a:noFill/>
+          <a:ln/>
+        </p:spPr>
+        <p:txBody>
+          <a:bodyPr wrap="none" lIns="0" tIns="0" rIns="0" bIns="0" rtlCol="0" anchor="ctr"/>
+          <a:lstStyle/>
+          <a:p>
+            <a:pPr algn="r" indent="0" marL="0">
+              <a:buNone/>
+            </a:pPr>
+            <a:r>
+              <a:rPr lang="en-US" sz="800" b="1" dirty="0">
+                <a:solidFill>
+                  <a:srgbClr val="10161F"/>
+                </a:solidFill>
+                <a:latin typeface="맑은 고딕" pitchFamily="34" charset="0"/>
+                <a:ea typeface="맑은 고딕" pitchFamily="34" charset="-122"/>
+                <a:cs typeface="맑은 고딕" pitchFamily="34" charset="-120"/>
+              </a:rPr>
+              <a:t>3F</a:t>
+            </a:r>
+            <a:endParaRPr lang="en-US" sz="800" dirty="0"/>
+          </a:p>
+        </p:txBody>
+      </p:sp>
+      <p:sp>
+        <p:nvSpPr>
+          <p:cNvPr id="15" name="Shape 13"/>
+          <p:cNvSpPr/>
+          <p:nvPr/>
+        </p:nvSpPr>
+        <p:spPr>
+          <a:xfrm>
+            <a:off x="1115568" y="5048295"/>
+            <a:ext cx="1444752" cy="195251"/>
+          </a:xfrm>
+          <a:prstGeom prst="rect">
+            <a:avLst/>
+          </a:prstGeom>
+          <a:solidFill>
+            <a:srgbClr val="C5B4E3"/>
+          </a:solidFill>
+          <a:ln w="9525">
+            <a:solidFill>
+              <a:srgbClr val="5B6B73"/>
+            </a:solidFill>
+            <a:prstDash val="solid"/>
+          </a:ln>
+        </p:spPr>
+      </p:sp>
+      <p:sp>
+        <p:nvSpPr>
+          <p:cNvPr id="16" name="Text 14"/>
+          <p:cNvSpPr/>
+          <p:nvPr/>
+        </p:nvSpPr>
+        <p:spPr>
+          <a:xfrm>
+            <a:off x="1143000" y="5048295"/>
+            <a:ext cx="1389888" cy="195251"/>
+          </a:xfrm>
+          <a:prstGeom prst="rect">
+            <a:avLst/>
+          </a:prstGeom>
+          <a:noFill/>
+          <a:ln/>
+        </p:spPr>
+        <p:txBody>
+          <a:bodyPr wrap="none" lIns="0" tIns="0" rIns="0" bIns="0" rtlCol="0" anchor="ctr"/>
+          <a:lstStyle/>
+          <a:p>
+            <a:pPr algn="ctr" indent="0" marL="0">
+              <a:buNone/>
+            </a:pPr>
+            <a:r>
+              <a:rPr lang="en-US" sz="700" dirty="0">
+                <a:solidFill>
+                  <a:srgbClr val="3A3A3A"/>
+                </a:solidFill>
+                <a:latin typeface="맑은 고딕" pitchFamily="34" charset="0"/>
+                <a:ea typeface="맑은 고딕" pitchFamily="34" charset="-122"/>
+                <a:cs typeface="맑은 고딕" pitchFamily="34" charset="-120"/>
+              </a:rPr>
+              <a:t>한국글로벌자산운용_3층_사업단</a:t>
+            </a:r>
+            <a:endParaRPr lang="en-US" sz="700" dirty="0"/>
+          </a:p>
+        </p:txBody>
+      </p:sp>
+      <p:sp>
+        <p:nvSpPr>
+          <p:cNvPr id="17" name="Text 15"/>
+          <p:cNvSpPr/>
+          <p:nvPr/>
+        </p:nvSpPr>
+        <p:spPr>
+          <a:xfrm>
+            <a:off x="566928" y="4757032"/>
+            <a:ext cx="475488" cy="259259"/>
+          </a:xfrm>
+          <a:prstGeom prst="rect">
+            <a:avLst/>
+          </a:prstGeom>
+          <a:noFill/>
+          <a:ln/>
+        </p:spPr>
+        <p:txBody>
+          <a:bodyPr wrap="none" lIns="0" tIns="0" rIns="0" bIns="0" rtlCol="0" anchor="ctr"/>
+          <a:lstStyle/>
+          <a:p>
+            <a:pPr algn="r" indent="0" marL="0">
+              <a:buNone/>
+            </a:pPr>
+            <a:r>
+              <a:rPr lang="en-US" sz="800" b="1" dirty="0">
+                <a:solidFill>
+                  <a:srgbClr val="10161F"/>
+                </a:solidFill>
+                <a:latin typeface="맑은 고딕" pitchFamily="34" charset="0"/>
+                <a:ea typeface="맑은 고딕" pitchFamily="34" charset="-122"/>
+                <a:cs typeface="맑은 고딕" pitchFamily="34" charset="-120"/>
+              </a:rPr>
+              <a:t>4F</a:t>
+            </a:r>
+            <a:endParaRPr lang="en-US" sz="800" dirty="0"/>
+          </a:p>
+        </p:txBody>
+      </p:sp>
+      <p:sp>
+        <p:nvSpPr>
+          <p:cNvPr id="18" name="Shape 16"/>
+          <p:cNvSpPr/>
+          <p:nvPr/>
+        </p:nvSpPr>
+        <p:spPr>
+          <a:xfrm>
+            <a:off x="1115568" y="4789036"/>
+            <a:ext cx="1444752" cy="195251"/>
+          </a:xfrm>
+          <a:prstGeom prst="rect">
+            <a:avLst/>
+          </a:prstGeom>
+          <a:solidFill>
+            <a:srgbClr val="C5B4E3"/>
+          </a:solidFill>
+          <a:ln w="9525">
+            <a:solidFill>
+              <a:srgbClr val="5B6B73"/>
+            </a:solidFill>
+            <a:prstDash val="solid"/>
+          </a:ln>
+        </p:spPr>
+      </p:sp>
+      <p:sp>
+        <p:nvSpPr>
+          <p:cNvPr id="19" name="Text 17"/>
+          <p:cNvSpPr/>
+          <p:nvPr/>
+        </p:nvSpPr>
+        <p:spPr>
+          <a:xfrm>
+            <a:off x="1143000" y="4789036"/>
+            <a:ext cx="1389888" cy="195251"/>
+          </a:xfrm>
+          <a:prstGeom prst="rect">
+            <a:avLst/>
+          </a:prstGeom>
+          <a:noFill/>
+          <a:ln/>
+        </p:spPr>
+        <p:txBody>
+          <a:bodyPr wrap="none" lIns="0" tIns="0" rIns="0" bIns="0" rtlCol="0" anchor="ctr"/>
+          <a:lstStyle/>
+          <a:p>
+            <a:pPr algn="ctr" indent="0" marL="0">
+              <a:buNone/>
+            </a:pPr>
+            <a:r>
+              <a:rPr lang="en-US" sz="700" dirty="0">
+                <a:solidFill>
+                  <a:srgbClr val="3A3A3A"/>
+                </a:solidFill>
+                <a:latin typeface="맑은 고딕" pitchFamily="34" charset="0"/>
+                <a:ea typeface="맑은 고딕" pitchFamily="34" charset="-122"/>
+                <a:cs typeface="맑은 고딕" pitchFamily="34" charset="-120"/>
+              </a:rPr>
+              <a:t>한국글로벌자산운용_4층_사업단</a:t>
+            </a:r>
+            <a:endParaRPr lang="en-US" sz="700" dirty="0"/>
+          </a:p>
+        </p:txBody>
+      </p:sp>
+      <p:sp>
+        <p:nvSpPr>
+          <p:cNvPr id="20" name="Text 18"/>
+          <p:cNvSpPr/>
+          <p:nvPr/>
+        </p:nvSpPr>
+        <p:spPr>
+          <a:xfrm>
+            <a:off x="566928" y="4497772"/>
+            <a:ext cx="475488" cy="259259"/>
+          </a:xfrm>
+          <a:prstGeom prst="rect">
+            <a:avLst/>
+          </a:prstGeom>
+          <a:noFill/>
+          <a:ln/>
+        </p:spPr>
+        <p:txBody>
+          <a:bodyPr wrap="none" lIns="0" tIns="0" rIns="0" bIns="0" rtlCol="0" anchor="ctr"/>
+          <a:lstStyle/>
+          <a:p>
+            <a:pPr algn="r" indent="0" marL="0">
+              <a:buNone/>
+            </a:pPr>
+            <a:r>
+              <a:rPr lang="en-US" sz="800" b="1" dirty="0">
+                <a:solidFill>
+                  <a:srgbClr val="10161F"/>
+                </a:solidFill>
+                <a:latin typeface="맑은 고딕" pitchFamily="34" charset="0"/>
+                <a:ea typeface="맑은 고딕" pitchFamily="34" charset="-122"/>
+                <a:cs typeface="맑은 고딕" pitchFamily="34" charset="-120"/>
+              </a:rPr>
+              <a:t>5F</a:t>
+            </a:r>
+            <a:endParaRPr lang="en-US" sz="800" dirty="0"/>
+          </a:p>
+        </p:txBody>
+      </p:sp>
+      <p:sp>
+        <p:nvSpPr>
+          <p:cNvPr id="21" name="Shape 19"/>
+          <p:cNvSpPr/>
+          <p:nvPr/>
+        </p:nvSpPr>
+        <p:spPr>
+          <a:xfrm>
+            <a:off x="1115568" y="4529776"/>
+            <a:ext cx="1444752" cy="195251"/>
+          </a:xfrm>
+          <a:prstGeom prst="rect">
+            <a:avLst/>
+          </a:prstGeom>
+          <a:solidFill>
+            <a:srgbClr val="C5B4E3"/>
+          </a:solidFill>
+          <a:ln w="9525">
+            <a:solidFill>
+              <a:srgbClr val="5B6B73"/>
+            </a:solidFill>
+            <a:prstDash val="solid"/>
+          </a:ln>
+        </p:spPr>
+      </p:sp>
+      <p:sp>
+        <p:nvSpPr>
+          <p:cNvPr id="22" name="Text 20"/>
+          <p:cNvSpPr/>
+          <p:nvPr/>
+        </p:nvSpPr>
+        <p:spPr>
+          <a:xfrm>
+            <a:off x="1143000" y="4529776"/>
+            <a:ext cx="1389888" cy="195251"/>
+          </a:xfrm>
+          <a:prstGeom prst="rect">
+            <a:avLst/>
+          </a:prstGeom>
+          <a:noFill/>
+          <a:ln/>
+        </p:spPr>
+        <p:txBody>
+          <a:bodyPr wrap="none" lIns="0" tIns="0" rIns="0" bIns="0" rtlCol="0" anchor="ctr"/>
+          <a:lstStyle/>
+          <a:p>
+            <a:pPr algn="ctr" indent="0" marL="0">
+              <a:buNone/>
+            </a:pPr>
+            <a:r>
+              <a:rPr lang="en-US" sz="700" dirty="0">
+                <a:solidFill>
+                  <a:srgbClr val="3A3A3A"/>
+                </a:solidFill>
+                <a:latin typeface="맑은 고딕" pitchFamily="34" charset="0"/>
+                <a:ea typeface="맑은 고딕" pitchFamily="34" charset="-122"/>
+                <a:cs typeface="맑은 고딕" pitchFamily="34" charset="-120"/>
+              </a:rPr>
+              <a:t>한국글로벌자산운용_5층_사업단</a:t>
+            </a:r>
+            <a:endParaRPr lang="en-US" sz="700" dirty="0"/>
+          </a:p>
+        </p:txBody>
+      </p:sp>
+      <p:sp>
+        <p:nvSpPr>
+          <p:cNvPr id="23" name="Text 21"/>
+          <p:cNvSpPr/>
+          <p:nvPr/>
+        </p:nvSpPr>
+        <p:spPr>
+          <a:xfrm>
+            <a:off x="566928" y="4238513"/>
+            <a:ext cx="475488" cy="259259"/>
+          </a:xfrm>
+          <a:prstGeom prst="rect">
+            <a:avLst/>
+          </a:prstGeom>
+          <a:noFill/>
+          <a:ln/>
+        </p:spPr>
+        <p:txBody>
+          <a:bodyPr wrap="none" lIns="0" tIns="0" rIns="0" bIns="0" rtlCol="0" anchor="ctr"/>
+          <a:lstStyle/>
+          <a:p>
+            <a:pPr algn="r" indent="0" marL="0">
+              <a:buNone/>
+            </a:pPr>
+            <a:r>
+              <a:rPr lang="en-US" sz="800" b="1" dirty="0">
+                <a:solidFill>
+                  <a:srgbClr val="10161F"/>
+                </a:solidFill>
+                <a:latin typeface="맑은 고딕" pitchFamily="34" charset="0"/>
+                <a:ea typeface="맑은 고딕" pitchFamily="34" charset="-122"/>
+                <a:cs typeface="맑은 고딕" pitchFamily="34" charset="-120"/>
+              </a:rPr>
+              <a:t>6F</a:t>
+            </a:r>
+            <a:endParaRPr lang="en-US" sz="800" dirty="0"/>
+          </a:p>
+        </p:txBody>
+      </p:sp>
+      <p:sp>
+        <p:nvSpPr>
+          <p:cNvPr id="24" name="Shape 22"/>
+          <p:cNvSpPr/>
+          <p:nvPr/>
+        </p:nvSpPr>
+        <p:spPr>
+          <a:xfrm>
+            <a:off x="1115568" y="4270517"/>
+            <a:ext cx="1444752" cy="195251"/>
+          </a:xfrm>
+          <a:prstGeom prst="rect">
+            <a:avLst/>
+          </a:prstGeom>
+          <a:solidFill>
+            <a:srgbClr val="C5B4E3"/>
+          </a:solidFill>
+          <a:ln w="9525">
+            <a:solidFill>
+              <a:srgbClr val="5B6B73"/>
+            </a:solidFill>
+            <a:prstDash val="solid"/>
+          </a:ln>
+        </p:spPr>
+      </p:sp>
+      <p:sp>
+        <p:nvSpPr>
+          <p:cNvPr id="25" name="Text 23"/>
+          <p:cNvSpPr/>
+          <p:nvPr/>
+        </p:nvSpPr>
+        <p:spPr>
+          <a:xfrm>
+            <a:off x="1143000" y="4270517"/>
+            <a:ext cx="1389888" cy="195251"/>
+          </a:xfrm>
+          <a:prstGeom prst="rect">
+            <a:avLst/>
+          </a:prstGeom>
+          <a:noFill/>
+          <a:ln/>
+        </p:spPr>
+        <p:txBody>
+          <a:bodyPr wrap="none" lIns="0" tIns="0" rIns="0" bIns="0" rtlCol="0" anchor="ctr"/>
+          <a:lstStyle/>
+          <a:p>
+            <a:pPr algn="ctr" indent="0" marL="0">
+              <a:buNone/>
+            </a:pPr>
+            <a:r>
+              <a:rPr lang="en-US" sz="700" dirty="0">
+                <a:solidFill>
+                  <a:srgbClr val="3A3A3A"/>
+                </a:solidFill>
+                <a:latin typeface="맑은 고딕" pitchFamily="34" charset="0"/>
+                <a:ea typeface="맑은 고딕" pitchFamily="34" charset="-122"/>
+                <a:cs typeface="맑은 고딕" pitchFamily="34" charset="-120"/>
+              </a:rPr>
+              <a:t>한국글로벌자산운용_6층_사업단</a:t>
+            </a:r>
+            <a:endParaRPr lang="en-US" sz="700" dirty="0"/>
+          </a:p>
+        </p:txBody>
+      </p:sp>
+      <p:sp>
+        <p:nvSpPr>
+          <p:cNvPr id="26" name="Text 24"/>
+          <p:cNvSpPr/>
+          <p:nvPr/>
+        </p:nvSpPr>
+        <p:spPr>
+          <a:xfrm>
+            <a:off x="566928" y="3979254"/>
+            <a:ext cx="475488" cy="259259"/>
+          </a:xfrm>
+          <a:prstGeom prst="rect">
+            <a:avLst/>
+          </a:prstGeom>
+          <a:noFill/>
+          <a:ln/>
+        </p:spPr>
+        <p:txBody>
+          <a:bodyPr wrap="none" lIns="0" tIns="0" rIns="0" bIns="0" rtlCol="0" anchor="ctr"/>
+          <a:lstStyle/>
+          <a:p>
+            <a:pPr algn="r" indent="0" marL="0">
+              <a:buNone/>
+            </a:pPr>
+            <a:r>
+              <a:rPr lang="en-US" sz="800" b="1" dirty="0">
+                <a:solidFill>
+                  <a:srgbClr val="10161F"/>
+                </a:solidFill>
+                <a:latin typeface="맑은 고딕" pitchFamily="34" charset="0"/>
+                <a:ea typeface="맑은 고딕" pitchFamily="34" charset="-122"/>
+                <a:cs typeface="맑은 고딕" pitchFamily="34" charset="-120"/>
+              </a:rPr>
+              <a:t>7F</a:t>
+            </a:r>
+            <a:endParaRPr lang="en-US" sz="800" dirty="0"/>
+          </a:p>
+        </p:txBody>
+      </p:sp>
+      <p:sp>
+        <p:nvSpPr>
+          <p:cNvPr id="27" name="Shape 25"/>
+          <p:cNvSpPr/>
+          <p:nvPr/>
+        </p:nvSpPr>
+        <p:spPr>
+          <a:xfrm>
+            <a:off x="1115568" y="4011258"/>
+            <a:ext cx="1444752" cy="195251"/>
+          </a:xfrm>
+          <a:prstGeom prst="rect">
+            <a:avLst/>
+          </a:prstGeom>
+          <a:solidFill>
+            <a:srgbClr val="C5B4E3"/>
+          </a:solidFill>
+          <a:ln w="9525">
+            <a:solidFill>
+              <a:srgbClr val="5B6B73"/>
+            </a:solidFill>
+            <a:prstDash val="solid"/>
+          </a:ln>
+        </p:spPr>
+      </p:sp>
+      <p:sp>
+        <p:nvSpPr>
+          <p:cNvPr id="28" name="Text 26"/>
+          <p:cNvSpPr/>
+          <p:nvPr/>
+        </p:nvSpPr>
+        <p:spPr>
+          <a:xfrm>
+            <a:off x="1143000" y="4011258"/>
+            <a:ext cx="1389888" cy="195251"/>
+          </a:xfrm>
+          <a:prstGeom prst="rect">
+            <a:avLst/>
+          </a:prstGeom>
+          <a:noFill/>
+          <a:ln/>
+        </p:spPr>
+        <p:txBody>
+          <a:bodyPr wrap="none" lIns="0" tIns="0" rIns="0" bIns="0" rtlCol="0" anchor="ctr"/>
+          <a:lstStyle/>
+          <a:p>
+            <a:pPr algn="ctr" indent="0" marL="0">
+              <a:buNone/>
+            </a:pPr>
+            <a:r>
+              <a:rPr lang="en-US" sz="700" dirty="0">
+                <a:solidFill>
+                  <a:srgbClr val="3A3A3A"/>
+                </a:solidFill>
+                <a:latin typeface="맑은 고딕" pitchFamily="34" charset="0"/>
+                <a:ea typeface="맑은 고딕" pitchFamily="34" charset="-122"/>
+                <a:cs typeface="맑은 고딕" pitchFamily="34" charset="-120"/>
+              </a:rPr>
+              <a:t>한국글로벌자산운용_7층_사업단</a:t>
+            </a:r>
+            <a:endParaRPr lang="en-US" sz="700" dirty="0"/>
+          </a:p>
+        </p:txBody>
+      </p:sp>
+      <p:sp>
+        <p:nvSpPr>
+          <p:cNvPr id="29" name="Text 27"/>
+          <p:cNvSpPr/>
+          <p:nvPr/>
+        </p:nvSpPr>
+        <p:spPr>
+          <a:xfrm>
+            <a:off x="566928" y="3719994"/>
+            <a:ext cx="475488" cy="259259"/>
+          </a:xfrm>
+          <a:prstGeom prst="rect">
+            <a:avLst/>
+          </a:prstGeom>
+          <a:noFill/>
+          <a:ln/>
+        </p:spPr>
+        <p:txBody>
+          <a:bodyPr wrap="none" lIns="0" tIns="0" rIns="0" bIns="0" rtlCol="0" anchor="ctr"/>
+          <a:lstStyle/>
+          <a:p>
+            <a:pPr algn="r" indent="0" marL="0">
+              <a:buNone/>
+            </a:pPr>
+            <a:r>
+              <a:rPr lang="en-US" sz="800" b="1" dirty="0">
+                <a:solidFill>
+                  <a:srgbClr val="10161F"/>
+                </a:solidFill>
+                <a:latin typeface="맑은 고딕" pitchFamily="34" charset="0"/>
+                <a:ea typeface="맑은 고딕" pitchFamily="34" charset="-122"/>
+                <a:cs typeface="맑은 고딕" pitchFamily="34" charset="-120"/>
+              </a:rPr>
+              <a:t>8F</a:t>
+            </a:r>
+            <a:endParaRPr lang="en-US" sz="800" dirty="0"/>
+          </a:p>
+        </p:txBody>
+      </p:sp>
+      <p:sp>
+        <p:nvSpPr>
+          <p:cNvPr id="30" name="Shape 28"/>
+          <p:cNvSpPr/>
+          <p:nvPr/>
+        </p:nvSpPr>
+        <p:spPr>
+          <a:xfrm>
+            <a:off x="1115568" y="3751998"/>
+            <a:ext cx="1444752" cy="195251"/>
+          </a:xfrm>
+          <a:prstGeom prst="rect">
+            <a:avLst/>
+          </a:prstGeom>
+          <a:solidFill>
+            <a:srgbClr val="C5B4E3"/>
+          </a:solidFill>
+          <a:ln w="9525">
+            <a:solidFill>
+              <a:srgbClr val="5B6B73"/>
+            </a:solidFill>
+            <a:prstDash val="solid"/>
+          </a:ln>
+        </p:spPr>
+      </p:sp>
+      <p:sp>
+        <p:nvSpPr>
+          <p:cNvPr id="31" name="Text 29"/>
+          <p:cNvSpPr/>
+          <p:nvPr/>
+        </p:nvSpPr>
+        <p:spPr>
+          <a:xfrm>
+            <a:off x="1143000" y="3751998"/>
+            <a:ext cx="1389888" cy="195251"/>
+          </a:xfrm>
+          <a:prstGeom prst="rect">
+            <a:avLst/>
+          </a:prstGeom>
+          <a:noFill/>
+          <a:ln/>
+        </p:spPr>
+        <p:txBody>
+          <a:bodyPr wrap="none" lIns="0" tIns="0" rIns="0" bIns="0" rtlCol="0" anchor="ctr"/>
+          <a:lstStyle/>
+          <a:p>
+            <a:pPr algn="ctr" indent="0" marL="0">
+              <a:buNone/>
+            </a:pPr>
+            <a:r>
+              <a:rPr lang="en-US" sz="700" dirty="0">
+                <a:solidFill>
+                  <a:srgbClr val="3A3A3A"/>
+                </a:solidFill>
+                <a:latin typeface="맑은 고딕" pitchFamily="34" charset="0"/>
+                <a:ea typeface="맑은 고딕" pitchFamily="34" charset="-122"/>
+                <a:cs typeface="맑은 고딕" pitchFamily="34" charset="-120"/>
+              </a:rPr>
+              <a:t>한국글로벌자산운용_8층_사업단</a:t>
+            </a:r>
+            <a:endParaRPr lang="en-US" sz="700" dirty="0"/>
+          </a:p>
+        </p:txBody>
+      </p:sp>
+      <p:sp>
+        <p:nvSpPr>
+          <p:cNvPr id="32" name="Text 30"/>
+          <p:cNvSpPr/>
+          <p:nvPr/>
+        </p:nvSpPr>
+        <p:spPr>
+          <a:xfrm>
+            <a:off x="566928" y="3460735"/>
+            <a:ext cx="475488" cy="259259"/>
+          </a:xfrm>
+          <a:prstGeom prst="rect">
+            <a:avLst/>
+          </a:prstGeom>
+          <a:noFill/>
+          <a:ln/>
+        </p:spPr>
+        <p:txBody>
+          <a:bodyPr wrap="none" lIns="0" tIns="0" rIns="0" bIns="0" rtlCol="0" anchor="ctr"/>
+          <a:lstStyle/>
+          <a:p>
+            <a:pPr algn="r" indent="0" marL="0">
+              <a:buNone/>
+            </a:pPr>
+            <a:r>
+              <a:rPr lang="en-US" sz="800" b="1" dirty="0">
+                <a:solidFill>
+                  <a:srgbClr val="10161F"/>
+                </a:solidFill>
+                <a:latin typeface="맑은 고딕" pitchFamily="34" charset="0"/>
+                <a:ea typeface="맑은 고딕" pitchFamily="34" charset="-122"/>
+                <a:cs typeface="맑은 고딕" pitchFamily="34" charset="-120"/>
+              </a:rPr>
+              <a:t>9F</a:t>
+            </a:r>
+            <a:endParaRPr lang="en-US" sz="800" dirty="0"/>
+          </a:p>
+        </p:txBody>
+      </p:sp>
+      <p:sp>
+        <p:nvSpPr>
+          <p:cNvPr id="33" name="Shape 31"/>
+          <p:cNvSpPr/>
+          <p:nvPr/>
+        </p:nvSpPr>
+        <p:spPr>
+          <a:xfrm>
+            <a:off x="1115568" y="3492739"/>
+            <a:ext cx="1444752" cy="195251"/>
+          </a:xfrm>
+          <a:prstGeom prst="rect">
+            <a:avLst/>
+          </a:prstGeom>
+          <a:solidFill>
+            <a:srgbClr val="C5B4E3"/>
+          </a:solidFill>
+          <a:ln w="9525">
+            <a:solidFill>
+              <a:srgbClr val="5B6B73"/>
+            </a:solidFill>
+            <a:prstDash val="solid"/>
+          </a:ln>
+        </p:spPr>
+      </p:sp>
+      <p:sp>
+        <p:nvSpPr>
+          <p:cNvPr id="34" name="Text 32"/>
+          <p:cNvSpPr/>
+          <p:nvPr/>
+        </p:nvSpPr>
+        <p:spPr>
+          <a:xfrm>
+            <a:off x="1143000" y="3492739"/>
+            <a:ext cx="1389888" cy="195251"/>
+          </a:xfrm>
+          <a:prstGeom prst="rect">
+            <a:avLst/>
+          </a:prstGeom>
+          <a:noFill/>
+          <a:ln/>
+        </p:spPr>
+        <p:txBody>
+          <a:bodyPr wrap="none" lIns="0" tIns="0" rIns="0" bIns="0" rtlCol="0" anchor="ctr"/>
+          <a:lstStyle/>
+          <a:p>
+            <a:pPr algn="ctr" indent="0" marL="0">
+              <a:buNone/>
+            </a:pPr>
+            <a:r>
+              <a:rPr lang="en-US" sz="700" dirty="0">
+                <a:solidFill>
+                  <a:srgbClr val="3A3A3A"/>
+                </a:solidFill>
+                <a:latin typeface="맑은 고딕" pitchFamily="34" charset="0"/>
+                <a:ea typeface="맑은 고딕" pitchFamily="34" charset="-122"/>
+                <a:cs typeface="맑은 고딕" pitchFamily="34" charset="-120"/>
+              </a:rPr>
+              <a:t>한국글로벌자산운용_9층_사업단</a:t>
+            </a:r>
+            <a:endParaRPr lang="en-US" sz="700" dirty="0"/>
+          </a:p>
+        </p:txBody>
+      </p:sp>
+      <p:sp>
+        <p:nvSpPr>
+          <p:cNvPr id="35" name="Text 33"/>
+          <p:cNvSpPr/>
+          <p:nvPr/>
+        </p:nvSpPr>
+        <p:spPr>
+          <a:xfrm>
+            <a:off x="566928" y="3201476"/>
+            <a:ext cx="475488" cy="259259"/>
+          </a:xfrm>
+          <a:prstGeom prst="rect">
+            <a:avLst/>
+          </a:prstGeom>
+          <a:noFill/>
+          <a:ln/>
+        </p:spPr>
+        <p:txBody>
+          <a:bodyPr wrap="none" lIns="0" tIns="0" rIns="0" bIns="0" rtlCol="0" anchor="ctr"/>
+          <a:lstStyle/>
+          <a:p>
+            <a:pPr algn="r" indent="0" marL="0">
+              <a:buNone/>
+            </a:pPr>
+            <a:r>
+              <a:rPr lang="en-US" sz="800" b="1" dirty="0">
+                <a:solidFill>
+                  <a:srgbClr val="10161F"/>
+                </a:solidFill>
+                <a:latin typeface="맑은 고딕" pitchFamily="34" charset="0"/>
+                <a:ea typeface="맑은 고딕" pitchFamily="34" charset="-122"/>
+                <a:cs typeface="맑은 고딕" pitchFamily="34" charset="-120"/>
+              </a:rPr>
+              <a:t>10F</a:t>
+            </a:r>
+            <a:endParaRPr lang="en-US" sz="800" dirty="0"/>
+          </a:p>
+        </p:txBody>
+      </p:sp>
+      <p:sp>
+        <p:nvSpPr>
+          <p:cNvPr id="36" name="Shape 34"/>
+          <p:cNvSpPr/>
+          <p:nvPr/>
+        </p:nvSpPr>
+        <p:spPr>
+          <a:xfrm>
+            <a:off x="1115568" y="3233480"/>
+            <a:ext cx="1444752" cy="195251"/>
+          </a:xfrm>
+          <a:prstGeom prst="rect">
+            <a:avLst/>
+          </a:prstGeom>
+          <a:solidFill>
+            <a:srgbClr val="C5B4E3"/>
+          </a:solidFill>
+          <a:ln w="9525">
+            <a:solidFill>
+              <a:srgbClr val="5B6B73"/>
+            </a:solidFill>
+            <a:prstDash val="solid"/>
+          </a:ln>
+        </p:spPr>
+      </p:sp>
+      <p:sp>
+        <p:nvSpPr>
+          <p:cNvPr id="37" name="Text 35"/>
+          <p:cNvSpPr/>
+          <p:nvPr/>
+        </p:nvSpPr>
+        <p:spPr>
+          <a:xfrm>
+            <a:off x="1143000" y="3233480"/>
+            <a:ext cx="1389888" cy="195251"/>
+          </a:xfrm>
+          <a:prstGeom prst="rect">
+            <a:avLst/>
+          </a:prstGeom>
+          <a:noFill/>
+          <a:ln/>
+        </p:spPr>
+        <p:txBody>
+          <a:bodyPr wrap="none" lIns="0" tIns="0" rIns="0" bIns="0" rtlCol="0" anchor="ctr"/>
+          <a:lstStyle/>
+          <a:p>
+            <a:pPr algn="ctr" indent="0" marL="0">
+              <a:buNone/>
+            </a:pPr>
+            <a:r>
+              <a:rPr lang="en-US" sz="700" dirty="0">
+                <a:solidFill>
+                  <a:srgbClr val="3A3A3A"/>
+                </a:solidFill>
+                <a:latin typeface="맑은 고딕" pitchFamily="34" charset="0"/>
+                <a:ea typeface="맑은 고딕" pitchFamily="34" charset="-122"/>
+                <a:cs typeface="맑은 고딕" pitchFamily="34" charset="-120"/>
+              </a:rPr>
+              <a:t>한국글로벌자산운용_10층_사업단</a:t>
+            </a:r>
+            <a:endParaRPr lang="en-US" sz="700" dirty="0"/>
+          </a:p>
+        </p:txBody>
+      </p:sp>
+      <p:sp>
+        <p:nvSpPr>
+          <p:cNvPr id="38" name="Text 36"/>
+          <p:cNvSpPr/>
+          <p:nvPr/>
+        </p:nvSpPr>
+        <p:spPr>
+          <a:xfrm>
+            <a:off x="566928" y="2942216"/>
+            <a:ext cx="475488" cy="259259"/>
+          </a:xfrm>
+          <a:prstGeom prst="rect">
+            <a:avLst/>
+          </a:prstGeom>
+          <a:noFill/>
+          <a:ln/>
+        </p:spPr>
+        <p:txBody>
+          <a:bodyPr wrap="none" lIns="0" tIns="0" rIns="0" bIns="0" rtlCol="0" anchor="ctr"/>
+          <a:lstStyle/>
+          <a:p>
+            <a:pPr algn="r" indent="0" marL="0">
+              <a:buNone/>
+            </a:pPr>
+            <a:r>
+              <a:rPr lang="en-US" sz="800" b="1" dirty="0">
+                <a:solidFill>
+                  <a:srgbClr val="10161F"/>
+                </a:solidFill>
+                <a:latin typeface="맑은 고딕" pitchFamily="34" charset="0"/>
+                <a:ea typeface="맑은 고딕" pitchFamily="34" charset="-122"/>
+                <a:cs typeface="맑은 고딕" pitchFamily="34" charset="-120"/>
+              </a:rPr>
+              <a:t>11F</a:t>
+            </a:r>
+            <a:endParaRPr lang="en-US" sz="800" dirty="0"/>
+          </a:p>
+        </p:txBody>
+      </p:sp>
+      <p:sp>
+        <p:nvSpPr>
+          <p:cNvPr id="39" name="Shape 37"/>
+          <p:cNvSpPr/>
+          <p:nvPr/>
+        </p:nvSpPr>
+        <p:spPr>
+          <a:xfrm>
+            <a:off x="1115568" y="2974220"/>
+            <a:ext cx="1444752" cy="195251"/>
+          </a:xfrm>
+          <a:prstGeom prst="rect">
+            <a:avLst/>
+          </a:prstGeom>
+          <a:solidFill>
+            <a:srgbClr val="C5B4E3"/>
+          </a:solidFill>
+          <a:ln w="9525">
+            <a:solidFill>
+              <a:srgbClr val="5B6B73"/>
+            </a:solidFill>
+            <a:prstDash val="solid"/>
+          </a:ln>
+        </p:spPr>
+      </p:sp>
+      <p:sp>
+        <p:nvSpPr>
+          <p:cNvPr id="40" name="Text 38"/>
+          <p:cNvSpPr/>
+          <p:nvPr/>
+        </p:nvSpPr>
+        <p:spPr>
+          <a:xfrm>
+            <a:off x="1143000" y="2974220"/>
+            <a:ext cx="1389888" cy="195251"/>
+          </a:xfrm>
+          <a:prstGeom prst="rect">
+            <a:avLst/>
+          </a:prstGeom>
+          <a:noFill/>
+          <a:ln/>
+        </p:spPr>
+        <p:txBody>
+          <a:bodyPr wrap="none" lIns="0" tIns="0" rIns="0" bIns="0" rtlCol="0" anchor="ctr"/>
+          <a:lstStyle/>
+          <a:p>
+            <a:pPr algn="ctr" indent="0" marL="0">
+              <a:buNone/>
+            </a:pPr>
+            <a:r>
+              <a:rPr lang="en-US" sz="700" dirty="0">
+                <a:solidFill>
+                  <a:srgbClr val="3A3A3A"/>
+                </a:solidFill>
+                <a:latin typeface="맑은 고딕" pitchFamily="34" charset="0"/>
+                <a:ea typeface="맑은 고딕" pitchFamily="34" charset="-122"/>
+                <a:cs typeface="맑은 고딕" pitchFamily="34" charset="-120"/>
+              </a:rPr>
+              <a:t>한국글로벌자산운용_11층_사업단</a:t>
+            </a:r>
+            <a:endParaRPr lang="en-US" sz="700" dirty="0"/>
+          </a:p>
+        </p:txBody>
+      </p:sp>
+      <p:sp>
+        <p:nvSpPr>
+          <p:cNvPr id="41" name="Text 39"/>
+          <p:cNvSpPr/>
+          <p:nvPr/>
+        </p:nvSpPr>
+        <p:spPr>
+          <a:xfrm>
+            <a:off x="566928" y="2682957"/>
+            <a:ext cx="475488" cy="259259"/>
+          </a:xfrm>
+          <a:prstGeom prst="rect">
+            <a:avLst/>
+          </a:prstGeom>
+          <a:noFill/>
+          <a:ln/>
+        </p:spPr>
+        <p:txBody>
+          <a:bodyPr wrap="none" lIns="0" tIns="0" rIns="0" bIns="0" rtlCol="0" anchor="ctr"/>
+          <a:lstStyle/>
+          <a:p>
+            <a:pPr algn="r" indent="0" marL="0">
+              <a:buNone/>
+            </a:pPr>
+            <a:r>
+              <a:rPr lang="en-US" sz="800" b="1" dirty="0">
+                <a:solidFill>
+                  <a:srgbClr val="10161F"/>
+                </a:solidFill>
+                <a:latin typeface="맑은 고딕" pitchFamily="34" charset="0"/>
+                <a:ea typeface="맑은 고딕" pitchFamily="34" charset="-122"/>
+                <a:cs typeface="맑은 고딕" pitchFamily="34" charset="-120"/>
+              </a:rPr>
+              <a:t>12F</a:t>
+            </a:r>
+            <a:endParaRPr lang="en-US" sz="800" dirty="0"/>
+          </a:p>
+        </p:txBody>
+      </p:sp>
+      <p:sp>
+        <p:nvSpPr>
+          <p:cNvPr id="42" name="Shape 40"/>
+          <p:cNvSpPr/>
+          <p:nvPr/>
+        </p:nvSpPr>
+        <p:spPr>
+          <a:xfrm>
+            <a:off x="1115568" y="2714961"/>
+            <a:ext cx="1444752" cy="195251"/>
+          </a:xfrm>
+          <a:prstGeom prst="rect">
+            <a:avLst/>
+          </a:prstGeom>
+          <a:solidFill>
+            <a:srgbClr val="C5B4E3"/>
+          </a:solidFill>
+          <a:ln w="9525">
+            <a:solidFill>
+              <a:srgbClr val="5B6B73"/>
+            </a:solidFill>
+            <a:prstDash val="solid"/>
+          </a:ln>
+        </p:spPr>
+      </p:sp>
+      <p:sp>
+        <p:nvSpPr>
+          <p:cNvPr id="43" name="Text 41"/>
+          <p:cNvSpPr/>
+          <p:nvPr/>
+        </p:nvSpPr>
+        <p:spPr>
+          <a:xfrm>
+            <a:off x="1143000" y="2714961"/>
+            <a:ext cx="1389888" cy="195251"/>
+          </a:xfrm>
+          <a:prstGeom prst="rect">
+            <a:avLst/>
+          </a:prstGeom>
+          <a:noFill/>
+          <a:ln/>
+        </p:spPr>
+        <p:txBody>
+          <a:bodyPr wrap="none" lIns="0" tIns="0" rIns="0" bIns="0" rtlCol="0" anchor="ctr"/>
+          <a:lstStyle/>
+          <a:p>
+            <a:pPr algn="ctr" indent="0" marL="0">
+              <a:buNone/>
+            </a:pPr>
+            <a:r>
+              <a:rPr lang="en-US" sz="700" dirty="0">
+                <a:solidFill>
+                  <a:srgbClr val="3A3A3A"/>
+                </a:solidFill>
+                <a:latin typeface="맑은 고딕" pitchFamily="34" charset="0"/>
+                <a:ea typeface="맑은 고딕" pitchFamily="34" charset="-122"/>
+                <a:cs typeface="맑은 고딕" pitchFamily="34" charset="-120"/>
+              </a:rPr>
+              <a:t>한국글로벌자산운용_12층_사업단</a:t>
+            </a:r>
+            <a:endParaRPr lang="en-US" sz="700" dirty="0"/>
+          </a:p>
+        </p:txBody>
+      </p:sp>
+      <p:sp>
+        <p:nvSpPr>
+          <p:cNvPr id="44" name="Text 42"/>
+          <p:cNvSpPr/>
+          <p:nvPr/>
+        </p:nvSpPr>
+        <p:spPr>
+          <a:xfrm>
+            <a:off x="566928" y="2423698"/>
+            <a:ext cx="475488" cy="259259"/>
+          </a:xfrm>
+          <a:prstGeom prst="rect">
+            <a:avLst/>
+          </a:prstGeom>
+          <a:noFill/>
+          <a:ln/>
+        </p:spPr>
+        <p:txBody>
+          <a:bodyPr wrap="none" lIns="0" tIns="0" rIns="0" bIns="0" rtlCol="0" anchor="ctr"/>
+          <a:lstStyle/>
+          <a:p>
+            <a:pPr algn="r" indent="0" marL="0">
+              <a:buNone/>
+            </a:pPr>
+            <a:r>
+              <a:rPr lang="en-US" sz="800" b="1" dirty="0">
+                <a:solidFill>
+                  <a:srgbClr val="10161F"/>
+                </a:solidFill>
+                <a:latin typeface="맑은 고딕" pitchFamily="34" charset="0"/>
+                <a:ea typeface="맑은 고딕" pitchFamily="34" charset="-122"/>
+                <a:cs typeface="맑은 고딕" pitchFamily="34" charset="-120"/>
+              </a:rPr>
+              <a:t>13F</a:t>
+            </a:r>
+            <a:endParaRPr lang="en-US" sz="800" dirty="0"/>
+          </a:p>
+        </p:txBody>
+      </p:sp>
+      <p:sp>
+        <p:nvSpPr>
+          <p:cNvPr id="45" name="Shape 43"/>
+          <p:cNvSpPr/>
+          <p:nvPr/>
+        </p:nvSpPr>
+        <p:spPr>
+          <a:xfrm>
+            <a:off x="1115568" y="2455702"/>
+            <a:ext cx="1444752" cy="195251"/>
+          </a:xfrm>
+          <a:prstGeom prst="rect">
+            <a:avLst/>
+          </a:prstGeom>
+          <a:solidFill>
+            <a:srgbClr val="C5B4E3"/>
+          </a:solidFill>
+          <a:ln w="9525">
+            <a:solidFill>
+              <a:srgbClr val="5B6B73"/>
+            </a:solidFill>
+            <a:prstDash val="solid"/>
+          </a:ln>
+        </p:spPr>
+      </p:sp>
+      <p:sp>
+        <p:nvSpPr>
+          <p:cNvPr id="46" name="Text 44"/>
+          <p:cNvSpPr/>
+          <p:nvPr/>
+        </p:nvSpPr>
+        <p:spPr>
+          <a:xfrm>
+            <a:off x="1143000" y="2455702"/>
+            <a:ext cx="1389888" cy="195251"/>
+          </a:xfrm>
+          <a:prstGeom prst="rect">
+            <a:avLst/>
+          </a:prstGeom>
+          <a:noFill/>
+          <a:ln/>
+        </p:spPr>
+        <p:txBody>
+          <a:bodyPr wrap="none" lIns="0" tIns="0" rIns="0" bIns="0" rtlCol="0" anchor="ctr"/>
+          <a:lstStyle/>
+          <a:p>
+            <a:pPr algn="ctr" indent="0" marL="0">
+              <a:buNone/>
+            </a:pPr>
+            <a:r>
+              <a:rPr lang="en-US" sz="700" dirty="0">
+                <a:solidFill>
+                  <a:srgbClr val="3A3A3A"/>
+                </a:solidFill>
+                <a:latin typeface="맑은 고딕" pitchFamily="34" charset="0"/>
+                <a:ea typeface="맑은 고딕" pitchFamily="34" charset="-122"/>
+                <a:cs typeface="맑은 고딕" pitchFamily="34" charset="-120"/>
+              </a:rPr>
+              <a:t>한국글로벌자산운용_13층_사업단</a:t>
+            </a:r>
+            <a:endParaRPr lang="en-US" sz="700" dirty="0"/>
+          </a:p>
+        </p:txBody>
+      </p:sp>
+      <p:sp>
+        <p:nvSpPr>
+          <p:cNvPr id="47" name="Text 45"/>
+          <p:cNvSpPr/>
+          <p:nvPr/>
+        </p:nvSpPr>
+        <p:spPr>
+          <a:xfrm>
+            <a:off x="566928" y="2164439"/>
+            <a:ext cx="475488" cy="259259"/>
+          </a:xfrm>
+          <a:prstGeom prst="rect">
+            <a:avLst/>
+          </a:prstGeom>
+          <a:noFill/>
+          <a:ln/>
+        </p:spPr>
+        <p:txBody>
+          <a:bodyPr wrap="none" lIns="0" tIns="0" rIns="0" bIns="0" rtlCol="0" anchor="ctr"/>
+          <a:lstStyle/>
+          <a:p>
+            <a:pPr algn="r" indent="0" marL="0">
+              <a:buNone/>
+            </a:pPr>
+            <a:r>
+              <a:rPr lang="en-US" sz="800" b="1" dirty="0">
+                <a:solidFill>
+                  <a:srgbClr val="10161F"/>
+                </a:solidFill>
+                <a:latin typeface="맑은 고딕" pitchFamily="34" charset="0"/>
+                <a:ea typeface="맑은 고딕" pitchFamily="34" charset="-122"/>
+                <a:cs typeface="맑은 고딕" pitchFamily="34" charset="-120"/>
+              </a:rPr>
+              <a:t>14F</a:t>
+            </a:r>
+            <a:endParaRPr lang="en-US" sz="800" dirty="0"/>
+          </a:p>
+        </p:txBody>
+      </p:sp>
+      <p:sp>
+        <p:nvSpPr>
+          <p:cNvPr id="48" name="Shape 46"/>
+          <p:cNvSpPr/>
+          <p:nvPr/>
+        </p:nvSpPr>
+        <p:spPr>
+          <a:xfrm>
+            <a:off x="1115568" y="2196443"/>
+            <a:ext cx="1444752" cy="195251"/>
+          </a:xfrm>
+          <a:prstGeom prst="rect">
+            <a:avLst/>
+          </a:prstGeom>
+          <a:solidFill>
+            <a:srgbClr val="C5B4E3"/>
+          </a:solidFill>
+          <a:ln w="9525">
+            <a:solidFill>
+              <a:srgbClr val="5B6B73"/>
+            </a:solidFill>
+            <a:prstDash val="solid"/>
+          </a:ln>
+        </p:spPr>
+      </p:sp>
+      <p:sp>
+        <p:nvSpPr>
+          <p:cNvPr id="49" name="Text 47"/>
+          <p:cNvSpPr/>
+          <p:nvPr/>
+        </p:nvSpPr>
+        <p:spPr>
+          <a:xfrm>
+            <a:off x="1143000" y="2196443"/>
+            <a:ext cx="1389888" cy="195251"/>
+          </a:xfrm>
+          <a:prstGeom prst="rect">
+            <a:avLst/>
+          </a:prstGeom>
+          <a:noFill/>
+          <a:ln/>
+        </p:spPr>
+        <p:txBody>
+          <a:bodyPr wrap="none" lIns="0" tIns="0" rIns="0" bIns="0" rtlCol="0" anchor="ctr"/>
+          <a:lstStyle/>
+          <a:p>
+            <a:pPr algn="ctr" indent="0" marL="0">
+              <a:buNone/>
+            </a:pPr>
+            <a:r>
+              <a:rPr lang="en-US" sz="700" dirty="0">
+                <a:solidFill>
+                  <a:srgbClr val="3A3A3A"/>
+                </a:solidFill>
+                <a:latin typeface="맑은 고딕" pitchFamily="34" charset="0"/>
+                <a:ea typeface="맑은 고딕" pitchFamily="34" charset="-122"/>
+                <a:cs typeface="맑은 고딕" pitchFamily="34" charset="-120"/>
+              </a:rPr>
+              <a:t>한국글로벌자산운용_14층_사업단</a:t>
+            </a:r>
+            <a:endParaRPr lang="en-US" sz="700" dirty="0"/>
+          </a:p>
+        </p:txBody>
+      </p:sp>
+      <p:sp>
+        <p:nvSpPr>
+          <p:cNvPr id="50" name="Text 48"/>
+          <p:cNvSpPr/>
+          <p:nvPr/>
+        </p:nvSpPr>
+        <p:spPr>
+          <a:xfrm>
+            <a:off x="566928" y="1905179"/>
+            <a:ext cx="475488" cy="259259"/>
+          </a:xfrm>
+          <a:prstGeom prst="rect">
+            <a:avLst/>
+          </a:prstGeom>
+          <a:noFill/>
+          <a:ln/>
+        </p:spPr>
+        <p:txBody>
+          <a:bodyPr wrap="none" lIns="0" tIns="0" rIns="0" bIns="0" rtlCol="0" anchor="ctr"/>
+          <a:lstStyle/>
+          <a:p>
+            <a:pPr algn="r" indent="0" marL="0">
+              <a:buNone/>
+            </a:pPr>
+            <a:r>
+              <a:rPr lang="en-US" sz="800" b="1" dirty="0">
+                <a:solidFill>
+                  <a:srgbClr val="10161F"/>
+                </a:solidFill>
+                <a:latin typeface="맑은 고딕" pitchFamily="34" charset="0"/>
+                <a:ea typeface="맑은 고딕" pitchFamily="34" charset="-122"/>
+                <a:cs typeface="맑은 고딕" pitchFamily="34" charset="-120"/>
+              </a:rPr>
+              <a:t>15F</a:t>
+            </a:r>
+            <a:endParaRPr lang="en-US" sz="800" dirty="0"/>
+          </a:p>
+        </p:txBody>
+      </p:sp>
+      <p:sp>
+        <p:nvSpPr>
+          <p:cNvPr id="51" name="Shape 49"/>
+          <p:cNvSpPr/>
+          <p:nvPr/>
+        </p:nvSpPr>
+        <p:spPr>
+          <a:xfrm>
+            <a:off x="1115568" y="1937183"/>
+            <a:ext cx="1444752" cy="195251"/>
+          </a:xfrm>
+          <a:prstGeom prst="rect">
+            <a:avLst/>
+          </a:prstGeom>
+          <a:solidFill>
+            <a:srgbClr val="C5B4E3"/>
+          </a:solidFill>
+          <a:ln w="9525">
+            <a:solidFill>
+              <a:srgbClr val="5B6B73"/>
+            </a:solidFill>
+            <a:prstDash val="solid"/>
+          </a:ln>
+        </p:spPr>
+      </p:sp>
+      <p:sp>
+        <p:nvSpPr>
+          <p:cNvPr id="52" name="Text 50"/>
+          <p:cNvSpPr/>
+          <p:nvPr/>
+        </p:nvSpPr>
+        <p:spPr>
+          <a:xfrm>
+            <a:off x="1143000" y="1937183"/>
+            <a:ext cx="1389888" cy="195251"/>
+          </a:xfrm>
+          <a:prstGeom prst="rect">
+            <a:avLst/>
+          </a:prstGeom>
+          <a:noFill/>
+          <a:ln/>
+        </p:spPr>
+        <p:txBody>
+          <a:bodyPr wrap="none" lIns="0" tIns="0" rIns="0" bIns="0" rtlCol="0" anchor="ctr"/>
+          <a:lstStyle/>
+          <a:p>
+            <a:pPr algn="ctr" indent="0" marL="0">
+              <a:buNone/>
+            </a:pPr>
+            <a:r>
+              <a:rPr lang="en-US" sz="700" dirty="0">
+                <a:solidFill>
+                  <a:srgbClr val="3A3A3A"/>
+                </a:solidFill>
+                <a:latin typeface="맑은 고딕" pitchFamily="34" charset="0"/>
+                <a:ea typeface="맑은 고딕" pitchFamily="34" charset="-122"/>
+                <a:cs typeface="맑은 고딕" pitchFamily="34" charset="-120"/>
+              </a:rPr>
+              <a:t>한국글로벌자산운용_15층_사업단</a:t>
+            </a:r>
+            <a:endParaRPr lang="en-US" sz="700" dirty="0"/>
+          </a:p>
+        </p:txBody>
+      </p:sp>
+      <p:sp>
+        <p:nvSpPr>
+          <p:cNvPr id="53" name="Text 51"/>
+          <p:cNvSpPr/>
+          <p:nvPr/>
+        </p:nvSpPr>
+        <p:spPr>
+          <a:xfrm>
+            <a:off x="603504" y="5794069"/>
+            <a:ext cx="232664" cy="259259"/>
+          </a:xfrm>
+          <a:prstGeom prst="rect">
+            <a:avLst/>
+          </a:prstGeom>
+          <a:noFill/>
+          <a:ln/>
+        </p:spPr>
+        <p:txBody>
+          <a:bodyPr wrap="none" lIns="0" tIns="0" rIns="0" bIns="0" rtlCol="0" anchor="ctr"/>
+          <a:lstStyle/>
+          <a:p>
+            <a:pPr indent="0" marL="0">
+              <a:buNone/>
+            </a:pPr>
+            <a:r>
+              <a:rPr lang="en-US" sz="700" dirty="0">
+                <a:solidFill>
+                  <a:srgbClr val="5B6B73"/>
+                </a:solidFill>
+                <a:latin typeface="맑은 고딕" pitchFamily="34" charset="0"/>
+                <a:ea typeface="맑은 고딕" pitchFamily="34" charset="-122"/>
+                <a:cs typeface="맑은 고딕" pitchFamily="34" charset="-120"/>
+              </a:rPr>
+              <a:t>만기</a:t>
+            </a:r>
+            <a:endParaRPr lang="en-US" sz="700" dirty="0"/>
+          </a:p>
+        </p:txBody>
+      </p:sp>
+      <p:sp>
+        <p:nvSpPr>
+          <p:cNvPr id="54" name="Shape 52"/>
+          <p:cNvSpPr/>
+          <p:nvPr/>
+        </p:nvSpPr>
+        <p:spPr>
+          <a:xfrm>
+            <a:off x="872744" y="5868834"/>
+            <a:ext cx="118872" cy="109728"/>
+          </a:xfrm>
+          <a:prstGeom prst="rect">
+            <a:avLst/>
+          </a:prstGeom>
+          <a:solidFill>
+            <a:srgbClr val="C5B4E3"/>
+          </a:solidFill>
+          <a:ln w="6350">
+            <a:solidFill>
+              <a:srgbClr val="5B6B73"/>
+            </a:solidFill>
+            <a:prstDash val="solid"/>
+          </a:ln>
+        </p:spPr>
+      </p:sp>
+      <p:sp>
+        <p:nvSpPr>
+          <p:cNvPr id="55" name="Text 53"/>
+          <p:cNvSpPr/>
+          <p:nvPr/>
+        </p:nvSpPr>
+        <p:spPr>
+          <a:xfrm>
+            <a:off x="1028192" y="5794069"/>
+            <a:ext cx="250444" cy="259259"/>
+          </a:xfrm>
+          <a:prstGeom prst="rect">
+            <a:avLst/>
+          </a:prstGeom>
+          <a:noFill/>
+          <a:ln/>
+        </p:spPr>
+        <p:txBody>
+          <a:bodyPr wrap="none" lIns="0" tIns="0" rIns="0" bIns="0" rtlCol="0" anchor="ctr"/>
+          <a:lstStyle/>
+          <a:p>
+            <a:pPr indent="0" marL="0">
+              <a:buNone/>
+            </a:pPr>
+            <a:r>
+              <a:rPr lang="en-US" sz="700" dirty="0">
+                <a:solidFill>
+                  <a:srgbClr val="5B6B73"/>
+                </a:solidFill>
+                <a:latin typeface="맑은 고딕" pitchFamily="34" charset="0"/>
+                <a:ea typeface="맑은 고딕" pitchFamily="34" charset="-122"/>
+                <a:cs typeface="맑은 고딕" pitchFamily="34" charset="-120"/>
+              </a:rPr>
+              <a:t>2028</a:t>
+            </a:r>
+            <a:endParaRPr lang="en-US" sz="700" dirty="0"/>
           </a:p>
         </p:txBody>
       </p:sp>
@@ -1068,26 +2741,26 @@
           </p:nvPr>
         </p:nvGraphicFramePr>
         <p:xfrm>
-          <a:off x="3950208" y="1645920"/>
-          <a:ext cx="7674559" cy="914400"/>
+          <a:off x="2807208" y="1645920"/>
+          <a:ext cx="8817559" cy="914400"/>
         </p:xfrm>
         <a:graphic>
           <a:graphicData uri="http://schemas.openxmlformats.org/drawingml/2006/table">
             <a:tbl>
               <a:tblPr/>
               <a:tblGrid>
-                <a:gridCol w="438912"/>
-                <a:gridCol w="960120"/>
-                <a:gridCol w="804672"/>
-                <a:gridCol w="713232"/>
-                <a:gridCol w="713232"/>
-                <a:gridCol w="713232"/>
-                <a:gridCol w="713232"/>
-                <a:gridCol w="713232"/>
-                <a:gridCol w="713232"/>
-                <a:gridCol w="1188720"/>
+                <a:gridCol w="411480"/>
+                <a:gridCol w="1874520"/>
+                <a:gridCol w="594360"/>
+                <a:gridCol w="621792"/>
+                <a:gridCol w="621792"/>
+                <a:gridCol w="1124712"/>
+                <a:gridCol w="950976"/>
+                <a:gridCol w="886968"/>
+                <a:gridCol w="950976"/>
+                <a:gridCol w="777240"/>
               </a:tblGrid>
-              <a:tr h="258184">
+              <a:tr h="259259">
                 <a:tc>
                   <a:txBody>
                     <a:bodyPr/>
@@ -1097,14 +2770,14 @@
                         <a:buNone/>
                       </a:pPr>
                       <a:r>
-                        <a:rPr lang="en-US" sz="900" b="1" dirty="0">
+                        <a:rPr lang="en-US" sz="850" b="1" dirty="0">
                           <a:solidFill>
                             <a:srgbClr val="FFFFFF"/>
                           </a:solidFill>
                         </a:rPr>
                         <a:t>층</a:t>
                       </a:r>
-                      <a:endParaRPr lang="en-US" sz="900" dirty="0"/>
+                      <a:endParaRPr lang="en-US" sz="850" dirty="0"/>
                     </a:p>
                   </a:txBody>
                   <a:tcPr marL="50800" marR="50800" marT="25400" marB="25400" anchor="ctr">
@@ -1158,14 +2831,14 @@
                         <a:buNone/>
                       </a:pPr>
                       <a:r>
-                        <a:rPr lang="en-US" sz="900" b="1" dirty="0">
+                        <a:rPr lang="en-US" sz="850" b="1" dirty="0">
                           <a:solidFill>
                             <a:srgbClr val="FFFFFF"/>
                           </a:solidFill>
                         </a:rPr>
                         <a:t>임차인</a:t>
                       </a:r>
-                      <a:endParaRPr lang="en-US" sz="900" dirty="0"/>
+                      <a:endParaRPr lang="en-US" sz="850" dirty="0"/>
                     </a:p>
                   </a:txBody>
                   <a:tcPr marL="50800" marR="50800" marT="25400" marB="25400" anchor="ctr">
@@ -1219,14 +2892,14 @@
                         <a:buNone/>
                       </a:pPr>
                       <a:r>
-                        <a:rPr lang="en-US" sz="900" b="1" dirty="0">
+                        <a:rPr lang="en-US" sz="850" b="1" dirty="0">
                           <a:solidFill>
                             <a:srgbClr val="FFFFFF"/>
                           </a:solidFill>
                         </a:rPr>
                         <a:t>용도</a:t>
                       </a:r>
-                      <a:endParaRPr lang="en-US" sz="900" dirty="0"/>
+                      <a:endParaRPr lang="en-US" sz="850" dirty="0"/>
                     </a:p>
                   </a:txBody>
                   <a:tcPr marL="50800" marR="50800" marT="25400" marB="25400" anchor="ctr">
@@ -1280,14 +2953,14 @@
                         <a:buNone/>
                       </a:pPr>
                       <a:r>
-                        <a:rPr lang="en-US" sz="900" b="1" dirty="0">
+                        <a:rPr lang="en-US" sz="850" b="1" dirty="0">
                           <a:solidFill>
                             <a:srgbClr val="FFFFFF"/>
                           </a:solidFill>
                         </a:rPr>
                         <a:t>임대면적</a:t>
                       </a:r>
-                      <a:endParaRPr lang="en-US" sz="900" dirty="0"/>
+                      <a:endParaRPr lang="en-US" sz="850" dirty="0"/>
                     </a:p>
                   </a:txBody>
                   <a:tcPr marL="50800" marR="50800" marT="25400" marB="25400" anchor="ctr">
@@ -1341,14 +3014,14 @@
                         <a:buNone/>
                       </a:pPr>
                       <a:r>
-                        <a:rPr lang="en-US" sz="900" b="1" dirty="0">
+                        <a:rPr lang="en-US" sz="850" b="1" dirty="0">
                           <a:solidFill>
                             <a:srgbClr val="FFFFFF"/>
                           </a:solidFill>
                         </a:rPr>
                         <a:t>전용면적</a:t>
                       </a:r>
-                      <a:endParaRPr lang="en-US" sz="900" dirty="0"/>
+                      <a:endParaRPr lang="en-US" sz="850" dirty="0"/>
                     </a:p>
                   </a:txBody>
                   <a:tcPr marL="50800" marR="50800" marT="25400" marB="25400" anchor="ctr">
@@ -1402,14 +3075,14 @@
                         <a:buNone/>
                       </a:pPr>
                       <a:r>
-                        <a:rPr lang="en-US" sz="900" b="1" dirty="0">
+                        <a:rPr lang="en-US" sz="850" b="1" dirty="0">
                           <a:solidFill>
                             <a:srgbClr val="FFFFFF"/>
                           </a:solidFill>
                         </a:rPr>
                         <a:t>보증금</a:t>
                       </a:r>
-                      <a:endParaRPr lang="en-US" sz="900" dirty="0"/>
+                      <a:endParaRPr lang="en-US" sz="850" dirty="0"/>
                     </a:p>
                   </a:txBody>
                   <a:tcPr marL="50800" marR="50800" marT="25400" marB="25400" anchor="ctr">
@@ -1463,14 +3136,14 @@
                         <a:buNone/>
                       </a:pPr>
                       <a:r>
-                        <a:rPr lang="en-US" sz="900" b="1" dirty="0">
+                        <a:rPr lang="en-US" sz="850" b="1" dirty="0">
                           <a:solidFill>
                             <a:srgbClr val="FFFFFF"/>
                           </a:solidFill>
                         </a:rPr>
                         <a:t>월임대료</a:t>
                       </a:r>
-                      <a:endParaRPr lang="en-US" sz="900" dirty="0"/>
+                      <a:endParaRPr lang="en-US" sz="850" dirty="0"/>
                     </a:p>
                   </a:txBody>
                   <a:tcPr marL="50800" marR="50800" marT="25400" marB="25400" anchor="ctr">
@@ -1524,14 +3197,14 @@
                         <a:buNone/>
                       </a:pPr>
                       <a:r>
-                        <a:rPr lang="en-US" sz="900" b="1" dirty="0">
+                        <a:rPr lang="en-US" sz="850" b="1" dirty="0">
                           <a:solidFill>
                             <a:srgbClr val="FFFFFF"/>
                           </a:solidFill>
                         </a:rPr>
                         <a:t>관리비</a:t>
                       </a:r>
-                      <a:endParaRPr lang="en-US" sz="900" dirty="0"/>
+                      <a:endParaRPr lang="en-US" sz="850" dirty="0"/>
                     </a:p>
                   </a:txBody>
                   <a:tcPr marL="50800" marR="50800" marT="25400" marB="25400" anchor="ctr">
@@ -1585,14 +3258,14 @@
                         <a:buNone/>
                       </a:pPr>
                       <a:r>
-                        <a:rPr lang="en-US" sz="900" b="1" dirty="0">
+                        <a:rPr lang="en-US" sz="850" b="1" dirty="0">
                           <a:solidFill>
                             <a:srgbClr val="FFFFFF"/>
                           </a:solidFill>
                         </a:rPr>
                         <a:t>월합계</a:t>
                       </a:r>
-                      <a:endParaRPr lang="en-US" sz="900" dirty="0"/>
+                      <a:endParaRPr lang="en-US" sz="850" dirty="0"/>
                     </a:p>
                   </a:txBody>
                   <a:tcPr marL="50800" marR="50800" marT="25400" marB="25400" anchor="ctr">
@@ -1646,14 +3319,14 @@
                         <a:buNone/>
                       </a:pPr>
                       <a:r>
-                        <a:rPr lang="en-US" sz="900" b="1" dirty="0">
+                        <a:rPr lang="en-US" sz="850" b="1" dirty="0">
                           <a:solidFill>
                             <a:srgbClr val="FFFFFF"/>
                           </a:solidFill>
                         </a:rPr>
                         <a:t>만기일</a:t>
                       </a:r>
-                      <a:endParaRPr lang="en-US" sz="900" dirty="0"/>
+                      <a:endParaRPr lang="en-US" sz="850" dirty="0"/>
                     </a:p>
                   </a:txBody>
                   <a:tcPr marL="50800" marR="50800" marT="25400" marB="25400" anchor="ctr">
@@ -1699,7 +3372,7 @@
                   </a:tcPr>
                 </a:tc>
               </a:tr>
-              <a:tr h="258184">
+              <a:tr h="259259">
                 <a:tc>
                   <a:txBody>
                     <a:bodyPr/>
@@ -1777,7 +3450,7 @@
                         <a:buNone/>
                       </a:pPr>
                       <a:r>
-                        <a:rPr lang="en-US" sz="700" dirty="0">
+                        <a:rPr lang="en-US" sz="800" dirty="0">
                           <a:solidFill>
                             <a:srgbClr val="2B2B2B"/>
                           </a:solidFill>
@@ -1787,7 +3460,7 @@
                         </a:rPr>
                         <a:t>한국글로벌자산운용_15층_사업단</a:t>
                       </a:r>
-                      <a:endParaRPr lang="en-US" sz="700" dirty="0">
+                      <a:endParaRPr lang="en-US" sz="800" dirty="0">
                         <a:latin typeface="맑은 고딕" charset="0"/>
                         <a:ea typeface="맑은 고딕" charset="0"/>
                         <a:cs typeface="맑은 고딕" charset="0"/>
@@ -2049,7 +3722,7 @@
                         <a:buNone/>
                       </a:pPr>
                       <a:r>
-                        <a:rPr lang="en-US" sz="700" dirty="0">
+                        <a:rPr lang="en-US" sz="800" dirty="0">
                           <a:solidFill>
                             <a:srgbClr val="2B2B2B"/>
                           </a:solidFill>
@@ -2059,7 +3732,7 @@
                         </a:rPr>
                         <a:t>150,000,000,000</a:t>
                       </a:r>
-                      <a:endParaRPr lang="en-US" sz="700" dirty="0">
+                      <a:endParaRPr lang="en-US" sz="800" dirty="0">
                         <a:latin typeface="맑은 고딕" charset="0"/>
                         <a:ea typeface="맑은 고딕" charset="0"/>
                         <a:cs typeface="맑은 고딕" charset="0"/>
@@ -2117,7 +3790,7 @@
                         <a:buNone/>
                       </a:pPr>
                       <a:r>
-                        <a:rPr lang="en-US" sz="700" dirty="0">
+                        <a:rPr lang="en-US" sz="800" dirty="0">
                           <a:solidFill>
                             <a:srgbClr val="2B2B2B"/>
                           </a:solidFill>
@@ -2127,7 +3800,7 @@
                         </a:rPr>
                         <a:t>1,250,000,000</a:t>
                       </a:r>
-                      <a:endParaRPr lang="en-US" sz="700" dirty="0">
+                      <a:endParaRPr lang="en-US" sz="800" dirty="0">
                         <a:latin typeface="맑은 고딕" charset="0"/>
                         <a:ea typeface="맑은 고딕" charset="0"/>
                         <a:cs typeface="맑은 고딕" charset="0"/>
@@ -2253,7 +3926,7 @@
                         <a:buNone/>
                       </a:pPr>
                       <a:r>
-                        <a:rPr lang="en-US" sz="700" dirty="0">
+                        <a:rPr lang="en-US" sz="800" dirty="0">
                           <a:solidFill>
                             <a:srgbClr val="2B2B2B"/>
                           </a:solidFill>
@@ -2263,7 +3936,7 @@
                         </a:rPr>
                         <a:t>1,400,000,000</a:t>
                       </a:r>
-                      <a:endParaRPr lang="en-US" sz="700" dirty="0">
+                      <a:endParaRPr lang="en-US" sz="800" dirty="0">
                         <a:latin typeface="맑은 고딕" charset="0"/>
                         <a:ea typeface="맑은 고딕" charset="0"/>
                         <a:cs typeface="맑은 고딕" charset="0"/>
@@ -2381,7 +4054,7 @@
                   </a:tcPr>
                 </a:tc>
               </a:tr>
-              <a:tr h="258184">
+              <a:tr h="259259">
                 <a:tc>
                   <a:txBody>
                     <a:bodyPr/>
@@ -2459,7 +4132,7 @@
                         <a:buNone/>
                       </a:pPr>
                       <a:r>
-                        <a:rPr lang="en-US" sz="700" dirty="0">
+                        <a:rPr lang="en-US" sz="800" dirty="0">
                           <a:solidFill>
                             <a:srgbClr val="2B2B2B"/>
                           </a:solidFill>
@@ -2469,7 +4142,7 @@
                         </a:rPr>
                         <a:t>한국글로벌자산운용_14층_사업단</a:t>
                       </a:r>
-                      <a:endParaRPr lang="en-US" sz="700" dirty="0">
+                      <a:endParaRPr lang="en-US" sz="800" dirty="0">
                         <a:latin typeface="맑은 고딕" charset="0"/>
                         <a:ea typeface="맑은 고딕" charset="0"/>
                         <a:cs typeface="맑은 고딕" charset="0"/>
@@ -2731,7 +4404,7 @@
                         <a:buNone/>
                       </a:pPr>
                       <a:r>
-                        <a:rPr lang="en-US" sz="700" dirty="0">
+                        <a:rPr lang="en-US" sz="800" dirty="0">
                           <a:solidFill>
                             <a:srgbClr val="2B2B2B"/>
                           </a:solidFill>
@@ -2741,7 +4414,7 @@
                         </a:rPr>
                         <a:t>150,000,000,000</a:t>
                       </a:r>
-                      <a:endParaRPr lang="en-US" sz="700" dirty="0">
+                      <a:endParaRPr lang="en-US" sz="800" dirty="0">
                         <a:latin typeface="맑은 고딕" charset="0"/>
                         <a:ea typeface="맑은 고딕" charset="0"/>
                         <a:cs typeface="맑은 고딕" charset="0"/>
@@ -2799,7 +4472,7 @@
                         <a:buNone/>
                       </a:pPr>
                       <a:r>
-                        <a:rPr lang="en-US" sz="700" dirty="0">
+                        <a:rPr lang="en-US" sz="800" dirty="0">
                           <a:solidFill>
                             <a:srgbClr val="2B2B2B"/>
                           </a:solidFill>
@@ -2809,7 +4482,7 @@
                         </a:rPr>
                         <a:t>1,250,000,000</a:t>
                       </a:r>
-                      <a:endParaRPr lang="en-US" sz="700" dirty="0">
+                      <a:endParaRPr lang="en-US" sz="800" dirty="0">
                         <a:latin typeface="맑은 고딕" charset="0"/>
                         <a:ea typeface="맑은 고딕" charset="0"/>
                         <a:cs typeface="맑은 고딕" charset="0"/>
@@ -2935,7 +4608,7 @@
                         <a:buNone/>
                       </a:pPr>
                       <a:r>
-                        <a:rPr lang="en-US" sz="700" dirty="0">
+                        <a:rPr lang="en-US" sz="800" dirty="0">
                           <a:solidFill>
                             <a:srgbClr val="2B2B2B"/>
                           </a:solidFill>
@@ -2945,7 +4618,7 @@
                         </a:rPr>
                         <a:t>1,400,000,000</a:t>
                       </a:r>
-                      <a:endParaRPr lang="en-US" sz="700" dirty="0">
+                      <a:endParaRPr lang="en-US" sz="800" dirty="0">
                         <a:latin typeface="맑은 고딕" charset="0"/>
                         <a:ea typeface="맑은 고딕" charset="0"/>
                         <a:cs typeface="맑은 고딕" charset="0"/>
@@ -3063,7 +4736,7 @@
                   </a:tcPr>
                 </a:tc>
               </a:tr>
-              <a:tr h="258184">
+              <a:tr h="259259">
                 <a:tc>
                   <a:txBody>
                     <a:bodyPr/>
@@ -3141,7 +4814,7 @@
                         <a:buNone/>
                       </a:pPr>
                       <a:r>
-                        <a:rPr lang="en-US" sz="700" dirty="0">
+                        <a:rPr lang="en-US" sz="800" dirty="0">
                           <a:solidFill>
                             <a:srgbClr val="2B2B2B"/>
                           </a:solidFill>
@@ -3151,7 +4824,7 @@
                         </a:rPr>
                         <a:t>한국글로벌자산운용_13층_사업단</a:t>
                       </a:r>
-                      <a:endParaRPr lang="en-US" sz="700" dirty="0">
+                      <a:endParaRPr lang="en-US" sz="800" dirty="0">
                         <a:latin typeface="맑은 고딕" charset="0"/>
                         <a:ea typeface="맑은 고딕" charset="0"/>
                         <a:cs typeface="맑은 고딕" charset="0"/>
@@ -3413,7 +5086,7 @@
                         <a:buNone/>
                       </a:pPr>
                       <a:r>
-                        <a:rPr lang="en-US" sz="700" dirty="0">
+                        <a:rPr lang="en-US" sz="800" dirty="0">
                           <a:solidFill>
                             <a:srgbClr val="2B2B2B"/>
                           </a:solidFill>
@@ -3423,7 +5096,7 @@
                         </a:rPr>
                         <a:t>150,000,000,000</a:t>
                       </a:r>
-                      <a:endParaRPr lang="en-US" sz="700" dirty="0">
+                      <a:endParaRPr lang="en-US" sz="800" dirty="0">
                         <a:latin typeface="맑은 고딕" charset="0"/>
                         <a:ea typeface="맑은 고딕" charset="0"/>
                         <a:cs typeface="맑은 고딕" charset="0"/>
@@ -3481,7 +5154,7 @@
                         <a:buNone/>
                       </a:pPr>
                       <a:r>
-                        <a:rPr lang="en-US" sz="700" dirty="0">
+                        <a:rPr lang="en-US" sz="800" dirty="0">
                           <a:solidFill>
                             <a:srgbClr val="2B2B2B"/>
                           </a:solidFill>
@@ -3491,7 +5164,7 @@
                         </a:rPr>
                         <a:t>1,250,000,000</a:t>
                       </a:r>
-                      <a:endParaRPr lang="en-US" sz="700" dirty="0">
+                      <a:endParaRPr lang="en-US" sz="800" dirty="0">
                         <a:latin typeface="맑은 고딕" charset="0"/>
                         <a:ea typeface="맑은 고딕" charset="0"/>
                         <a:cs typeface="맑은 고딕" charset="0"/>
@@ -3617,7 +5290,7 @@
                         <a:buNone/>
                       </a:pPr>
                       <a:r>
-                        <a:rPr lang="en-US" sz="700" dirty="0">
+                        <a:rPr lang="en-US" sz="800" dirty="0">
                           <a:solidFill>
                             <a:srgbClr val="2B2B2B"/>
                           </a:solidFill>
@@ -3627,7 +5300,7 @@
                         </a:rPr>
                         <a:t>1,400,000,000</a:t>
                       </a:r>
-                      <a:endParaRPr lang="en-US" sz="700" dirty="0">
+                      <a:endParaRPr lang="en-US" sz="800" dirty="0">
                         <a:latin typeface="맑은 고딕" charset="0"/>
                         <a:ea typeface="맑은 고딕" charset="0"/>
                         <a:cs typeface="맑은 고딕" charset="0"/>
@@ -3745,7 +5418,7 @@
                   </a:tcPr>
                 </a:tc>
               </a:tr>
-              <a:tr h="258184">
+              <a:tr h="259259">
                 <a:tc>
                   <a:txBody>
                     <a:bodyPr/>
@@ -3823,7 +5496,7 @@
                         <a:buNone/>
                       </a:pPr>
                       <a:r>
-                        <a:rPr lang="en-US" sz="700" dirty="0">
+                        <a:rPr lang="en-US" sz="800" dirty="0">
                           <a:solidFill>
                             <a:srgbClr val="2B2B2B"/>
                           </a:solidFill>
@@ -3833,7 +5506,7 @@
                         </a:rPr>
                         <a:t>한국글로벌자산운용_12층_사업단</a:t>
                       </a:r>
-                      <a:endParaRPr lang="en-US" sz="700" dirty="0">
+                      <a:endParaRPr lang="en-US" sz="800" dirty="0">
                         <a:latin typeface="맑은 고딕" charset="0"/>
                         <a:ea typeface="맑은 고딕" charset="0"/>
                         <a:cs typeface="맑은 고딕" charset="0"/>
@@ -4095,7 +5768,7 @@
                         <a:buNone/>
                       </a:pPr>
                       <a:r>
-                        <a:rPr lang="en-US" sz="700" dirty="0">
+                        <a:rPr lang="en-US" sz="800" dirty="0">
                           <a:solidFill>
                             <a:srgbClr val="2B2B2B"/>
                           </a:solidFill>
@@ -4105,7 +5778,7 @@
                         </a:rPr>
                         <a:t>150,000,000,000</a:t>
                       </a:r>
-                      <a:endParaRPr lang="en-US" sz="700" dirty="0">
+                      <a:endParaRPr lang="en-US" sz="800" dirty="0">
                         <a:latin typeface="맑은 고딕" charset="0"/>
                         <a:ea typeface="맑은 고딕" charset="0"/>
                         <a:cs typeface="맑은 고딕" charset="0"/>
@@ -4163,7 +5836,7 @@
                         <a:buNone/>
                       </a:pPr>
                       <a:r>
-                        <a:rPr lang="en-US" sz="700" dirty="0">
+                        <a:rPr lang="en-US" sz="800" dirty="0">
                           <a:solidFill>
                             <a:srgbClr val="2B2B2B"/>
                           </a:solidFill>
@@ -4173,7 +5846,7 @@
                         </a:rPr>
                         <a:t>1,250,000,000</a:t>
                       </a:r>
-                      <a:endParaRPr lang="en-US" sz="700" dirty="0">
+                      <a:endParaRPr lang="en-US" sz="800" dirty="0">
                         <a:latin typeface="맑은 고딕" charset="0"/>
                         <a:ea typeface="맑은 고딕" charset="0"/>
                         <a:cs typeface="맑은 고딕" charset="0"/>
@@ -4299,7 +5972,7 @@
                         <a:buNone/>
                       </a:pPr>
                       <a:r>
-                        <a:rPr lang="en-US" sz="700" dirty="0">
+                        <a:rPr lang="en-US" sz="800" dirty="0">
                           <a:solidFill>
                             <a:srgbClr val="2B2B2B"/>
                           </a:solidFill>
@@ -4309,7 +5982,7 @@
                         </a:rPr>
                         <a:t>1,400,000,000</a:t>
                       </a:r>
-                      <a:endParaRPr lang="en-US" sz="700" dirty="0">
+                      <a:endParaRPr lang="en-US" sz="800" dirty="0">
                         <a:latin typeface="맑은 고딕" charset="0"/>
                         <a:ea typeface="맑은 고딕" charset="0"/>
                         <a:cs typeface="맑은 고딕" charset="0"/>
@@ -4427,7 +6100,7 @@
                   </a:tcPr>
                 </a:tc>
               </a:tr>
-              <a:tr h="258184">
+              <a:tr h="259259">
                 <a:tc>
                   <a:txBody>
                     <a:bodyPr/>
@@ -4505,7 +6178,7 @@
                         <a:buNone/>
                       </a:pPr>
                       <a:r>
-                        <a:rPr lang="en-US" sz="700" dirty="0">
+                        <a:rPr lang="en-US" sz="800" dirty="0">
                           <a:solidFill>
                             <a:srgbClr val="2B2B2B"/>
                           </a:solidFill>
@@ -4515,7 +6188,7 @@
                         </a:rPr>
                         <a:t>한국글로벌자산운용_11층_사업단</a:t>
                       </a:r>
-                      <a:endParaRPr lang="en-US" sz="700" dirty="0">
+                      <a:endParaRPr lang="en-US" sz="800" dirty="0">
                         <a:latin typeface="맑은 고딕" charset="0"/>
                         <a:ea typeface="맑은 고딕" charset="0"/>
                         <a:cs typeface="맑은 고딕" charset="0"/>
@@ -4777,7 +6450,7 @@
                         <a:buNone/>
                       </a:pPr>
                       <a:r>
-                        <a:rPr lang="en-US" sz="700" dirty="0">
+                        <a:rPr lang="en-US" sz="800" dirty="0">
                           <a:solidFill>
                             <a:srgbClr val="2B2B2B"/>
                           </a:solidFill>
@@ -4787,7 +6460,7 @@
                         </a:rPr>
                         <a:t>150,000,000,000</a:t>
                       </a:r>
-                      <a:endParaRPr lang="en-US" sz="700" dirty="0">
+                      <a:endParaRPr lang="en-US" sz="800" dirty="0">
                         <a:latin typeface="맑은 고딕" charset="0"/>
                         <a:ea typeface="맑은 고딕" charset="0"/>
                         <a:cs typeface="맑은 고딕" charset="0"/>
@@ -4845,7 +6518,7 @@
                         <a:buNone/>
                       </a:pPr>
                       <a:r>
-                        <a:rPr lang="en-US" sz="700" dirty="0">
+                        <a:rPr lang="en-US" sz="800" dirty="0">
                           <a:solidFill>
                             <a:srgbClr val="2B2B2B"/>
                           </a:solidFill>
@@ -4855,7 +6528,7 @@
                         </a:rPr>
                         <a:t>1,250,000,000</a:t>
                       </a:r>
-                      <a:endParaRPr lang="en-US" sz="700" dirty="0">
+                      <a:endParaRPr lang="en-US" sz="800" dirty="0">
                         <a:latin typeface="맑은 고딕" charset="0"/>
                         <a:ea typeface="맑은 고딕" charset="0"/>
                         <a:cs typeface="맑은 고딕" charset="0"/>
@@ -4981,7 +6654,7 @@
                         <a:buNone/>
                       </a:pPr>
                       <a:r>
-                        <a:rPr lang="en-US" sz="700" dirty="0">
+                        <a:rPr lang="en-US" sz="800" dirty="0">
                           <a:solidFill>
                             <a:srgbClr val="2B2B2B"/>
                           </a:solidFill>
@@ -4991,7 +6664,7 @@
                         </a:rPr>
                         <a:t>1,400,000,000</a:t>
                       </a:r>
-                      <a:endParaRPr lang="en-US" sz="700" dirty="0">
+                      <a:endParaRPr lang="en-US" sz="800" dirty="0">
                         <a:latin typeface="맑은 고딕" charset="0"/>
                         <a:ea typeface="맑은 고딕" charset="0"/>
                         <a:cs typeface="맑은 고딕" charset="0"/>
@@ -5109,7 +6782,7 @@
                   </a:tcPr>
                 </a:tc>
               </a:tr>
-              <a:tr h="258184">
+              <a:tr h="259259">
                 <a:tc>
                   <a:txBody>
                     <a:bodyPr/>
@@ -5187,7 +6860,7 @@
                         <a:buNone/>
                       </a:pPr>
                       <a:r>
-                        <a:rPr lang="en-US" sz="700" dirty="0">
+                        <a:rPr lang="en-US" sz="800" dirty="0">
                           <a:solidFill>
                             <a:srgbClr val="2B2B2B"/>
                           </a:solidFill>
@@ -5197,7 +6870,7 @@
                         </a:rPr>
                         <a:t>한국글로벌자산운용_10층_사업단</a:t>
                       </a:r>
-                      <a:endParaRPr lang="en-US" sz="700" dirty="0">
+                      <a:endParaRPr lang="en-US" sz="800" dirty="0">
                         <a:latin typeface="맑은 고딕" charset="0"/>
                         <a:ea typeface="맑은 고딕" charset="0"/>
                         <a:cs typeface="맑은 고딕" charset="0"/>
@@ -5459,7 +7132,7 @@
                         <a:buNone/>
                       </a:pPr>
                       <a:r>
-                        <a:rPr lang="en-US" sz="700" dirty="0">
+                        <a:rPr lang="en-US" sz="800" dirty="0">
                           <a:solidFill>
                             <a:srgbClr val="2B2B2B"/>
                           </a:solidFill>
@@ -5469,7 +7142,7 @@
                         </a:rPr>
                         <a:t>150,000,000,000</a:t>
                       </a:r>
-                      <a:endParaRPr lang="en-US" sz="700" dirty="0">
+                      <a:endParaRPr lang="en-US" sz="800" dirty="0">
                         <a:latin typeface="맑은 고딕" charset="0"/>
                         <a:ea typeface="맑은 고딕" charset="0"/>
                         <a:cs typeface="맑은 고딕" charset="0"/>
@@ -5527,7 +7200,7 @@
                         <a:buNone/>
                       </a:pPr>
                       <a:r>
-                        <a:rPr lang="en-US" sz="700" dirty="0">
+                        <a:rPr lang="en-US" sz="800" dirty="0">
                           <a:solidFill>
                             <a:srgbClr val="2B2B2B"/>
                           </a:solidFill>
@@ -5537,7 +7210,7 @@
                         </a:rPr>
                         <a:t>1,250,000,000</a:t>
                       </a:r>
-                      <a:endParaRPr lang="en-US" sz="700" dirty="0">
+                      <a:endParaRPr lang="en-US" sz="800" dirty="0">
                         <a:latin typeface="맑은 고딕" charset="0"/>
                         <a:ea typeface="맑은 고딕" charset="0"/>
                         <a:cs typeface="맑은 고딕" charset="0"/>
@@ -5663,7 +7336,7 @@
                         <a:buNone/>
                       </a:pPr>
                       <a:r>
-                        <a:rPr lang="en-US" sz="700" dirty="0">
+                        <a:rPr lang="en-US" sz="800" dirty="0">
                           <a:solidFill>
                             <a:srgbClr val="2B2B2B"/>
                           </a:solidFill>
@@ -5673,7 +7346,7 @@
                         </a:rPr>
                         <a:t>1,400,000,000</a:t>
                       </a:r>
-                      <a:endParaRPr lang="en-US" sz="700" dirty="0">
+                      <a:endParaRPr lang="en-US" sz="800" dirty="0">
                         <a:latin typeface="맑은 고딕" charset="0"/>
                         <a:ea typeface="맑은 고딕" charset="0"/>
                         <a:cs typeface="맑은 고딕" charset="0"/>
@@ -5791,7 +7464,7 @@
                   </a:tcPr>
                 </a:tc>
               </a:tr>
-              <a:tr h="258184">
+              <a:tr h="259259">
                 <a:tc>
                   <a:txBody>
                     <a:bodyPr/>
@@ -5869,7 +7542,7 @@
                         <a:buNone/>
                       </a:pPr>
                       <a:r>
-                        <a:rPr lang="en-US" sz="700" dirty="0">
+                        <a:rPr lang="en-US" sz="800" dirty="0">
                           <a:solidFill>
                             <a:srgbClr val="2B2B2B"/>
                           </a:solidFill>
@@ -5879,7 +7552,7 @@
                         </a:rPr>
                         <a:t>한국글로벌자산운용_9층_사업단</a:t>
                       </a:r>
-                      <a:endParaRPr lang="en-US" sz="700" dirty="0">
+                      <a:endParaRPr lang="en-US" sz="800" dirty="0">
                         <a:latin typeface="맑은 고딕" charset="0"/>
                         <a:ea typeface="맑은 고딕" charset="0"/>
                         <a:cs typeface="맑은 고딕" charset="0"/>
@@ -6141,7 +7814,7 @@
                         <a:buNone/>
                       </a:pPr>
                       <a:r>
-                        <a:rPr lang="en-US" sz="700" dirty="0">
+                        <a:rPr lang="en-US" sz="800" dirty="0">
                           <a:solidFill>
                             <a:srgbClr val="2B2B2B"/>
                           </a:solidFill>
@@ -6151,7 +7824,7 @@
                         </a:rPr>
                         <a:t>150,000,000,000</a:t>
                       </a:r>
-                      <a:endParaRPr lang="en-US" sz="700" dirty="0">
+                      <a:endParaRPr lang="en-US" sz="800" dirty="0">
                         <a:latin typeface="맑은 고딕" charset="0"/>
                         <a:ea typeface="맑은 고딕" charset="0"/>
                         <a:cs typeface="맑은 고딕" charset="0"/>
@@ -6209,7 +7882,7 @@
                         <a:buNone/>
                       </a:pPr>
                       <a:r>
-                        <a:rPr lang="en-US" sz="700" dirty="0">
+                        <a:rPr lang="en-US" sz="800" dirty="0">
                           <a:solidFill>
                             <a:srgbClr val="2B2B2B"/>
                           </a:solidFill>
@@ -6219,7 +7892,7 @@
                         </a:rPr>
                         <a:t>1,250,000,000</a:t>
                       </a:r>
-                      <a:endParaRPr lang="en-US" sz="700" dirty="0">
+                      <a:endParaRPr lang="en-US" sz="800" dirty="0">
                         <a:latin typeface="맑은 고딕" charset="0"/>
                         <a:ea typeface="맑은 고딕" charset="0"/>
                         <a:cs typeface="맑은 고딕" charset="0"/>
@@ -6345,7 +8018,7 @@
                         <a:buNone/>
                       </a:pPr>
                       <a:r>
-                        <a:rPr lang="en-US" sz="700" dirty="0">
+                        <a:rPr lang="en-US" sz="800" dirty="0">
                           <a:solidFill>
                             <a:srgbClr val="2B2B2B"/>
                           </a:solidFill>
@@ -6355,7 +8028,7 @@
                         </a:rPr>
                         <a:t>1,400,000,000</a:t>
                       </a:r>
-                      <a:endParaRPr lang="en-US" sz="700" dirty="0">
+                      <a:endParaRPr lang="en-US" sz="800" dirty="0">
                         <a:latin typeface="맑은 고딕" charset="0"/>
                         <a:ea typeface="맑은 고딕" charset="0"/>
                         <a:cs typeface="맑은 고딕" charset="0"/>
@@ -6473,7 +8146,7 @@
                   </a:tcPr>
                 </a:tc>
               </a:tr>
-              <a:tr h="258184">
+              <a:tr h="259259">
                 <a:tc>
                   <a:txBody>
                     <a:bodyPr/>
@@ -6551,7 +8224,7 @@
                         <a:buNone/>
                       </a:pPr>
                       <a:r>
-                        <a:rPr lang="en-US" sz="700" dirty="0">
+                        <a:rPr lang="en-US" sz="800" dirty="0">
                           <a:solidFill>
                             <a:srgbClr val="2B2B2B"/>
                           </a:solidFill>
@@ -6561,7 +8234,7 @@
                         </a:rPr>
                         <a:t>한국글로벌자산운용_8층_사업단</a:t>
                       </a:r>
-                      <a:endParaRPr lang="en-US" sz="700" dirty="0">
+                      <a:endParaRPr lang="en-US" sz="800" dirty="0">
                         <a:latin typeface="맑은 고딕" charset="0"/>
                         <a:ea typeface="맑은 고딕" charset="0"/>
                         <a:cs typeface="맑은 고딕" charset="0"/>
@@ -6823,7 +8496,7 @@
                         <a:buNone/>
                       </a:pPr>
                       <a:r>
-                        <a:rPr lang="en-US" sz="700" dirty="0">
+                        <a:rPr lang="en-US" sz="800" dirty="0">
                           <a:solidFill>
                             <a:srgbClr val="2B2B2B"/>
                           </a:solidFill>
@@ -6833,7 +8506,7 @@
                         </a:rPr>
                         <a:t>150,000,000,000</a:t>
                       </a:r>
-                      <a:endParaRPr lang="en-US" sz="700" dirty="0">
+                      <a:endParaRPr lang="en-US" sz="800" dirty="0">
                         <a:latin typeface="맑은 고딕" charset="0"/>
                         <a:ea typeface="맑은 고딕" charset="0"/>
                         <a:cs typeface="맑은 고딕" charset="0"/>
@@ -6891,7 +8564,7 @@
                         <a:buNone/>
                       </a:pPr>
                       <a:r>
-                        <a:rPr lang="en-US" sz="700" dirty="0">
+                        <a:rPr lang="en-US" sz="800" dirty="0">
                           <a:solidFill>
                             <a:srgbClr val="2B2B2B"/>
                           </a:solidFill>
@@ -6901,7 +8574,7 @@
                         </a:rPr>
                         <a:t>1,250,000,000</a:t>
                       </a:r>
-                      <a:endParaRPr lang="en-US" sz="700" dirty="0">
+                      <a:endParaRPr lang="en-US" sz="800" dirty="0">
                         <a:latin typeface="맑은 고딕" charset="0"/>
                         <a:ea typeface="맑은 고딕" charset="0"/>
                         <a:cs typeface="맑은 고딕" charset="0"/>
@@ -7027,7 +8700,7 @@
                         <a:buNone/>
                       </a:pPr>
                       <a:r>
-                        <a:rPr lang="en-US" sz="700" dirty="0">
+                        <a:rPr lang="en-US" sz="800" dirty="0">
                           <a:solidFill>
                             <a:srgbClr val="2B2B2B"/>
                           </a:solidFill>
@@ -7037,7 +8710,7 @@
                         </a:rPr>
                         <a:t>1,400,000,000</a:t>
                       </a:r>
-                      <a:endParaRPr lang="en-US" sz="700" dirty="0">
+                      <a:endParaRPr lang="en-US" sz="800" dirty="0">
                         <a:latin typeface="맑은 고딕" charset="0"/>
                         <a:ea typeface="맑은 고딕" charset="0"/>
                         <a:cs typeface="맑은 고딕" charset="0"/>
@@ -7155,7 +8828,7 @@
                   </a:tcPr>
                 </a:tc>
               </a:tr>
-              <a:tr h="258184">
+              <a:tr h="259259">
                 <a:tc>
                   <a:txBody>
                     <a:bodyPr/>
@@ -7233,7 +8906,7 @@
                         <a:buNone/>
                       </a:pPr>
                       <a:r>
-                        <a:rPr lang="en-US" sz="700" dirty="0">
+                        <a:rPr lang="en-US" sz="800" dirty="0">
                           <a:solidFill>
                             <a:srgbClr val="2B2B2B"/>
                           </a:solidFill>
@@ -7243,7 +8916,7 @@
                         </a:rPr>
                         <a:t>한국글로벌자산운용_7층_사업단</a:t>
                       </a:r>
-                      <a:endParaRPr lang="en-US" sz="700" dirty="0">
+                      <a:endParaRPr lang="en-US" sz="800" dirty="0">
                         <a:latin typeface="맑은 고딕" charset="0"/>
                         <a:ea typeface="맑은 고딕" charset="0"/>
                         <a:cs typeface="맑은 고딕" charset="0"/>
@@ -7505,7 +9178,7 @@
                         <a:buNone/>
                       </a:pPr>
                       <a:r>
-                        <a:rPr lang="en-US" sz="700" dirty="0">
+                        <a:rPr lang="en-US" sz="800" dirty="0">
                           <a:solidFill>
                             <a:srgbClr val="2B2B2B"/>
                           </a:solidFill>
@@ -7515,7 +9188,7 @@
                         </a:rPr>
                         <a:t>150,000,000,000</a:t>
                       </a:r>
-                      <a:endParaRPr lang="en-US" sz="700" dirty="0">
+                      <a:endParaRPr lang="en-US" sz="800" dirty="0">
                         <a:latin typeface="맑은 고딕" charset="0"/>
                         <a:ea typeface="맑은 고딕" charset="0"/>
                         <a:cs typeface="맑은 고딕" charset="0"/>
@@ -7573,7 +9246,7 @@
                         <a:buNone/>
                       </a:pPr>
                       <a:r>
-                        <a:rPr lang="en-US" sz="700" dirty="0">
+                        <a:rPr lang="en-US" sz="800" dirty="0">
                           <a:solidFill>
                             <a:srgbClr val="2B2B2B"/>
                           </a:solidFill>
@@ -7583,7 +9256,7 @@
                         </a:rPr>
                         <a:t>1,250,000,000</a:t>
                       </a:r>
-                      <a:endParaRPr lang="en-US" sz="700" dirty="0">
+                      <a:endParaRPr lang="en-US" sz="800" dirty="0">
                         <a:latin typeface="맑은 고딕" charset="0"/>
                         <a:ea typeface="맑은 고딕" charset="0"/>
                         <a:cs typeface="맑은 고딕" charset="0"/>
@@ -7709,7 +9382,7 @@
                         <a:buNone/>
                       </a:pPr>
                       <a:r>
-                        <a:rPr lang="en-US" sz="700" dirty="0">
+                        <a:rPr lang="en-US" sz="800" dirty="0">
                           <a:solidFill>
                             <a:srgbClr val="2B2B2B"/>
                           </a:solidFill>
@@ -7719,7 +9392,7 @@
                         </a:rPr>
                         <a:t>1,400,000,000</a:t>
                       </a:r>
-                      <a:endParaRPr lang="en-US" sz="700" dirty="0">
+                      <a:endParaRPr lang="en-US" sz="800" dirty="0">
                         <a:latin typeface="맑은 고딕" charset="0"/>
                         <a:ea typeface="맑은 고딕" charset="0"/>
                         <a:cs typeface="맑은 고딕" charset="0"/>
@@ -7837,7 +9510,7 @@
                   </a:tcPr>
                 </a:tc>
               </a:tr>
-              <a:tr h="258184">
+              <a:tr h="259259">
                 <a:tc>
                   <a:txBody>
                     <a:bodyPr/>
@@ -7915,7 +9588,7 @@
                         <a:buNone/>
                       </a:pPr>
                       <a:r>
-                        <a:rPr lang="en-US" sz="700" dirty="0">
+                        <a:rPr lang="en-US" sz="800" dirty="0">
                           <a:solidFill>
                             <a:srgbClr val="2B2B2B"/>
                           </a:solidFill>
@@ -7925,7 +9598,7 @@
                         </a:rPr>
                         <a:t>한국글로벌자산운용_6층_사업단</a:t>
                       </a:r>
-                      <a:endParaRPr lang="en-US" sz="700" dirty="0">
+                      <a:endParaRPr lang="en-US" sz="800" dirty="0">
                         <a:latin typeface="맑은 고딕" charset="0"/>
                         <a:ea typeface="맑은 고딕" charset="0"/>
                         <a:cs typeface="맑은 고딕" charset="0"/>
@@ -8187,7 +9860,7 @@
                         <a:buNone/>
                       </a:pPr>
                       <a:r>
-                        <a:rPr lang="en-US" sz="700" dirty="0">
+                        <a:rPr lang="en-US" sz="800" dirty="0">
                           <a:solidFill>
                             <a:srgbClr val="2B2B2B"/>
                           </a:solidFill>
@@ -8197,7 +9870,7 @@
                         </a:rPr>
                         <a:t>150,000,000,000</a:t>
                       </a:r>
-                      <a:endParaRPr lang="en-US" sz="700" dirty="0">
+                      <a:endParaRPr lang="en-US" sz="800" dirty="0">
                         <a:latin typeface="맑은 고딕" charset="0"/>
                         <a:ea typeface="맑은 고딕" charset="0"/>
                         <a:cs typeface="맑은 고딕" charset="0"/>
@@ -8255,7 +9928,7 @@
                         <a:buNone/>
                       </a:pPr>
                       <a:r>
-                        <a:rPr lang="en-US" sz="700" dirty="0">
+                        <a:rPr lang="en-US" sz="800" dirty="0">
                           <a:solidFill>
                             <a:srgbClr val="2B2B2B"/>
                           </a:solidFill>
@@ -8265,7 +9938,7 @@
                         </a:rPr>
                         <a:t>1,250,000,000</a:t>
                       </a:r>
-                      <a:endParaRPr lang="en-US" sz="700" dirty="0">
+                      <a:endParaRPr lang="en-US" sz="800" dirty="0">
                         <a:latin typeface="맑은 고딕" charset="0"/>
                         <a:ea typeface="맑은 고딕" charset="0"/>
                         <a:cs typeface="맑은 고딕" charset="0"/>
@@ -8391,7 +10064,7 @@
                         <a:buNone/>
                       </a:pPr>
                       <a:r>
-                        <a:rPr lang="en-US" sz="700" dirty="0">
+                        <a:rPr lang="en-US" sz="800" dirty="0">
                           <a:solidFill>
                             <a:srgbClr val="2B2B2B"/>
                           </a:solidFill>
@@ -8401,7 +10074,7 @@
                         </a:rPr>
                         <a:t>1,400,000,000</a:t>
                       </a:r>
-                      <a:endParaRPr lang="en-US" sz="700" dirty="0">
+                      <a:endParaRPr lang="en-US" sz="800" dirty="0">
                         <a:latin typeface="맑은 고딕" charset="0"/>
                         <a:ea typeface="맑은 고딕" charset="0"/>
                         <a:cs typeface="맑은 고딕" charset="0"/>
@@ -8519,7 +10192,7 @@
                   </a:tcPr>
                 </a:tc>
               </a:tr>
-              <a:tr h="258184">
+              <a:tr h="259259">
                 <a:tc>
                   <a:txBody>
                     <a:bodyPr/>
@@ -8597,7 +10270,7 @@
                         <a:buNone/>
                       </a:pPr>
                       <a:r>
-                        <a:rPr lang="en-US" sz="700" dirty="0">
+                        <a:rPr lang="en-US" sz="800" dirty="0">
                           <a:solidFill>
                             <a:srgbClr val="2B2B2B"/>
                           </a:solidFill>
@@ -8607,7 +10280,7 @@
                         </a:rPr>
                         <a:t>한국글로벌자산운용_5층_사업단</a:t>
                       </a:r>
-                      <a:endParaRPr lang="en-US" sz="700" dirty="0">
+                      <a:endParaRPr lang="en-US" sz="800" dirty="0">
                         <a:latin typeface="맑은 고딕" charset="0"/>
                         <a:ea typeface="맑은 고딕" charset="0"/>
                         <a:cs typeface="맑은 고딕" charset="0"/>
@@ -8869,7 +10542,7 @@
                         <a:buNone/>
                       </a:pPr>
                       <a:r>
-                        <a:rPr lang="en-US" sz="700" dirty="0">
+                        <a:rPr lang="en-US" sz="800" dirty="0">
                           <a:solidFill>
                             <a:srgbClr val="2B2B2B"/>
                           </a:solidFill>
@@ -8879,7 +10552,7 @@
                         </a:rPr>
                         <a:t>150,000,000,000</a:t>
                       </a:r>
-                      <a:endParaRPr lang="en-US" sz="700" dirty="0">
+                      <a:endParaRPr lang="en-US" sz="800" dirty="0">
                         <a:latin typeface="맑은 고딕" charset="0"/>
                         <a:ea typeface="맑은 고딕" charset="0"/>
                         <a:cs typeface="맑은 고딕" charset="0"/>
@@ -8937,7 +10610,7 @@
                         <a:buNone/>
                       </a:pPr>
                       <a:r>
-                        <a:rPr lang="en-US" sz="700" dirty="0">
+                        <a:rPr lang="en-US" sz="800" dirty="0">
                           <a:solidFill>
                             <a:srgbClr val="2B2B2B"/>
                           </a:solidFill>
@@ -8947,7 +10620,7 @@
                         </a:rPr>
                         <a:t>1,250,000,000</a:t>
                       </a:r>
-                      <a:endParaRPr lang="en-US" sz="700" dirty="0">
+                      <a:endParaRPr lang="en-US" sz="800" dirty="0">
                         <a:latin typeface="맑은 고딕" charset="0"/>
                         <a:ea typeface="맑은 고딕" charset="0"/>
                         <a:cs typeface="맑은 고딕" charset="0"/>
@@ -9073,7 +10746,7 @@
                         <a:buNone/>
                       </a:pPr>
                       <a:r>
-                        <a:rPr lang="en-US" sz="700" dirty="0">
+                        <a:rPr lang="en-US" sz="800" dirty="0">
                           <a:solidFill>
                             <a:srgbClr val="2B2B2B"/>
                           </a:solidFill>
@@ -9083,7 +10756,7 @@
                         </a:rPr>
                         <a:t>1,400,000,000</a:t>
                       </a:r>
-                      <a:endParaRPr lang="en-US" sz="700" dirty="0">
+                      <a:endParaRPr lang="en-US" sz="800" dirty="0">
                         <a:latin typeface="맑은 고딕" charset="0"/>
                         <a:ea typeface="맑은 고딕" charset="0"/>
                         <a:cs typeface="맑은 고딕" charset="0"/>
@@ -9201,7 +10874,7 @@
                   </a:tcPr>
                 </a:tc>
               </a:tr>
-              <a:tr h="258184">
+              <a:tr h="259259">
                 <a:tc>
                   <a:txBody>
                     <a:bodyPr/>
@@ -9279,7 +10952,7 @@
                         <a:buNone/>
                       </a:pPr>
                       <a:r>
-                        <a:rPr lang="en-US" sz="700" dirty="0">
+                        <a:rPr lang="en-US" sz="800" dirty="0">
                           <a:solidFill>
                             <a:srgbClr val="2B2B2B"/>
                           </a:solidFill>
@@ -9289,7 +10962,7 @@
                         </a:rPr>
                         <a:t>한국글로벌자산운용_4층_사업단</a:t>
                       </a:r>
-                      <a:endParaRPr lang="en-US" sz="700" dirty="0">
+                      <a:endParaRPr lang="en-US" sz="800" dirty="0">
                         <a:latin typeface="맑은 고딕" charset="0"/>
                         <a:ea typeface="맑은 고딕" charset="0"/>
                         <a:cs typeface="맑은 고딕" charset="0"/>
@@ -9551,7 +11224,7 @@
                         <a:buNone/>
                       </a:pPr>
                       <a:r>
-                        <a:rPr lang="en-US" sz="700" dirty="0">
+                        <a:rPr lang="en-US" sz="800" dirty="0">
                           <a:solidFill>
                             <a:srgbClr val="2B2B2B"/>
                           </a:solidFill>
@@ -9561,7 +11234,7 @@
                         </a:rPr>
                         <a:t>150,000,000,000</a:t>
                       </a:r>
-                      <a:endParaRPr lang="en-US" sz="700" dirty="0">
+                      <a:endParaRPr lang="en-US" sz="800" dirty="0">
                         <a:latin typeface="맑은 고딕" charset="0"/>
                         <a:ea typeface="맑은 고딕" charset="0"/>
                         <a:cs typeface="맑은 고딕" charset="0"/>
@@ -9619,7 +11292,7 @@
                         <a:buNone/>
                       </a:pPr>
                       <a:r>
-                        <a:rPr lang="en-US" sz="700" dirty="0">
+                        <a:rPr lang="en-US" sz="800" dirty="0">
                           <a:solidFill>
                             <a:srgbClr val="2B2B2B"/>
                           </a:solidFill>
@@ -9629,7 +11302,7 @@
                         </a:rPr>
                         <a:t>1,250,000,000</a:t>
                       </a:r>
-                      <a:endParaRPr lang="en-US" sz="700" dirty="0">
+                      <a:endParaRPr lang="en-US" sz="800" dirty="0">
                         <a:latin typeface="맑은 고딕" charset="0"/>
                         <a:ea typeface="맑은 고딕" charset="0"/>
                         <a:cs typeface="맑은 고딕" charset="0"/>
@@ -9755,7 +11428,7 @@
                         <a:buNone/>
                       </a:pPr>
                       <a:r>
-                        <a:rPr lang="en-US" sz="700" dirty="0">
+                        <a:rPr lang="en-US" sz="800" dirty="0">
                           <a:solidFill>
                             <a:srgbClr val="2B2B2B"/>
                           </a:solidFill>
@@ -9765,7 +11438,7 @@
                         </a:rPr>
                         <a:t>1,400,000,000</a:t>
                       </a:r>
-                      <a:endParaRPr lang="en-US" sz="700" dirty="0">
+                      <a:endParaRPr lang="en-US" sz="800" dirty="0">
                         <a:latin typeface="맑은 고딕" charset="0"/>
                         <a:ea typeface="맑은 고딕" charset="0"/>
                         <a:cs typeface="맑은 고딕" charset="0"/>
@@ -9883,7 +11556,7 @@
                   </a:tcPr>
                 </a:tc>
               </a:tr>
-              <a:tr h="258184">
+              <a:tr h="259259">
                 <a:tc>
                   <a:txBody>
                     <a:bodyPr/>
@@ -9961,7 +11634,7 @@
                         <a:buNone/>
                       </a:pPr>
                       <a:r>
-                        <a:rPr lang="en-US" sz="700" dirty="0">
+                        <a:rPr lang="en-US" sz="800" dirty="0">
                           <a:solidFill>
                             <a:srgbClr val="2B2B2B"/>
                           </a:solidFill>
@@ -9971,7 +11644,7 @@
                         </a:rPr>
                         <a:t>한국글로벌자산운용_3층_사업단</a:t>
                       </a:r>
-                      <a:endParaRPr lang="en-US" sz="700" dirty="0">
+                      <a:endParaRPr lang="en-US" sz="800" dirty="0">
                         <a:latin typeface="맑은 고딕" charset="0"/>
                         <a:ea typeface="맑은 고딕" charset="0"/>
                         <a:cs typeface="맑은 고딕" charset="0"/>
@@ -10233,7 +11906,7 @@
                         <a:buNone/>
                       </a:pPr>
                       <a:r>
-                        <a:rPr lang="en-US" sz="700" dirty="0">
+                        <a:rPr lang="en-US" sz="800" dirty="0">
                           <a:solidFill>
                             <a:srgbClr val="2B2B2B"/>
                           </a:solidFill>
@@ -10243,7 +11916,7 @@
                         </a:rPr>
                         <a:t>150,000,000,000</a:t>
                       </a:r>
-                      <a:endParaRPr lang="en-US" sz="700" dirty="0">
+                      <a:endParaRPr lang="en-US" sz="800" dirty="0">
                         <a:latin typeface="맑은 고딕" charset="0"/>
                         <a:ea typeface="맑은 고딕" charset="0"/>
                         <a:cs typeface="맑은 고딕" charset="0"/>
@@ -10301,7 +11974,7 @@
                         <a:buNone/>
                       </a:pPr>
                       <a:r>
-                        <a:rPr lang="en-US" sz="700" dirty="0">
+                        <a:rPr lang="en-US" sz="800" dirty="0">
                           <a:solidFill>
                             <a:srgbClr val="2B2B2B"/>
                           </a:solidFill>
@@ -10311,7 +11984,7 @@
                         </a:rPr>
                         <a:t>1,250,000,000</a:t>
                       </a:r>
-                      <a:endParaRPr lang="en-US" sz="700" dirty="0">
+                      <a:endParaRPr lang="en-US" sz="800" dirty="0">
                         <a:latin typeface="맑은 고딕" charset="0"/>
                         <a:ea typeface="맑은 고딕" charset="0"/>
                         <a:cs typeface="맑은 고딕" charset="0"/>
@@ -10437,7 +12110,7 @@
                         <a:buNone/>
                       </a:pPr>
                       <a:r>
-                        <a:rPr lang="en-US" sz="700" dirty="0">
+                        <a:rPr lang="en-US" sz="800" dirty="0">
                           <a:solidFill>
                             <a:srgbClr val="2B2B2B"/>
                           </a:solidFill>
@@ -10447,7 +12120,7 @@
                         </a:rPr>
                         <a:t>1,400,000,000</a:t>
                       </a:r>
-                      <a:endParaRPr lang="en-US" sz="700" dirty="0">
+                      <a:endParaRPr lang="en-US" sz="800" dirty="0">
                         <a:latin typeface="맑은 고딕" charset="0"/>
                         <a:ea typeface="맑은 고딕" charset="0"/>
                         <a:cs typeface="맑은 고딕" charset="0"/>
@@ -10565,7 +12238,7 @@
                   </a:tcPr>
                 </a:tc>
               </a:tr>
-              <a:tr h="258184">
+              <a:tr h="259259">
                 <a:tc>
                   <a:txBody>
                     <a:bodyPr/>
@@ -10643,7 +12316,7 @@
                         <a:buNone/>
                       </a:pPr>
                       <a:r>
-                        <a:rPr lang="en-US" sz="700" dirty="0">
+                        <a:rPr lang="en-US" sz="800" dirty="0">
                           <a:solidFill>
                             <a:srgbClr val="2B2B2B"/>
                           </a:solidFill>
@@ -10653,7 +12326,7 @@
                         </a:rPr>
                         <a:t>한국글로벌자산운용_2층_사업단</a:t>
                       </a:r>
-                      <a:endParaRPr lang="en-US" sz="700" dirty="0">
+                      <a:endParaRPr lang="en-US" sz="800" dirty="0">
                         <a:latin typeface="맑은 고딕" charset="0"/>
                         <a:ea typeface="맑은 고딕" charset="0"/>
                         <a:cs typeface="맑은 고딕" charset="0"/>
@@ -10915,7 +12588,7 @@
                         <a:buNone/>
                       </a:pPr>
                       <a:r>
-                        <a:rPr lang="en-US" sz="700" dirty="0">
+                        <a:rPr lang="en-US" sz="800" dirty="0">
                           <a:solidFill>
                             <a:srgbClr val="2B2B2B"/>
                           </a:solidFill>
@@ -10925,7 +12598,7 @@
                         </a:rPr>
                         <a:t>150,000,000,000</a:t>
                       </a:r>
-                      <a:endParaRPr lang="en-US" sz="700" dirty="0">
+                      <a:endParaRPr lang="en-US" sz="800" dirty="0">
                         <a:latin typeface="맑은 고딕" charset="0"/>
                         <a:ea typeface="맑은 고딕" charset="0"/>
                         <a:cs typeface="맑은 고딕" charset="0"/>
@@ -10983,7 +12656,7 @@
                         <a:buNone/>
                       </a:pPr>
                       <a:r>
-                        <a:rPr lang="en-US" sz="700" dirty="0">
+                        <a:rPr lang="en-US" sz="800" dirty="0">
                           <a:solidFill>
                             <a:srgbClr val="2B2B2B"/>
                           </a:solidFill>
@@ -10993,7 +12666,7 @@
                         </a:rPr>
                         <a:t>1,250,000,000</a:t>
                       </a:r>
-                      <a:endParaRPr lang="en-US" sz="700" dirty="0">
+                      <a:endParaRPr lang="en-US" sz="800" dirty="0">
                         <a:latin typeface="맑은 고딕" charset="0"/>
                         <a:ea typeface="맑은 고딕" charset="0"/>
                         <a:cs typeface="맑은 고딕" charset="0"/>
@@ -11119,7 +12792,7 @@
                         <a:buNone/>
                       </a:pPr>
                       <a:r>
-                        <a:rPr lang="en-US" sz="700" dirty="0">
+                        <a:rPr lang="en-US" sz="800" dirty="0">
                           <a:solidFill>
                             <a:srgbClr val="2B2B2B"/>
                           </a:solidFill>
@@ -11129,7 +12802,7 @@
                         </a:rPr>
                         <a:t>1,400,000,000</a:t>
                       </a:r>
-                      <a:endParaRPr lang="en-US" sz="700" dirty="0">
+                      <a:endParaRPr lang="en-US" sz="800" dirty="0">
                         <a:latin typeface="맑은 고딕" charset="0"/>
                         <a:ea typeface="맑은 고딕" charset="0"/>
                         <a:cs typeface="맑은 고딕" charset="0"/>
@@ -11247,7 +12920,7 @@
                   </a:tcPr>
                 </a:tc>
               </a:tr>
-              <a:tr h="258184">
+              <a:tr h="259259">
                 <a:tc>
                   <a:txBody>
                     <a:bodyPr/>
@@ -11325,7 +12998,7 @@
                         <a:buNone/>
                       </a:pPr>
                       <a:r>
-                        <a:rPr lang="en-US" sz="700" dirty="0">
+                        <a:rPr lang="en-US" sz="800" dirty="0">
                           <a:solidFill>
                             <a:srgbClr val="2B2B2B"/>
                           </a:solidFill>
@@ -11335,7 +13008,7 @@
                         </a:rPr>
                         <a:t>스타벅스코리아리저브DT점</a:t>
                       </a:r>
-                      <a:endParaRPr lang="en-US" sz="700" dirty="0">
+                      <a:endParaRPr lang="en-US" sz="800" dirty="0">
                         <a:latin typeface="맑은 고딕" charset="0"/>
                         <a:ea typeface="맑은 고딕" charset="0"/>
                         <a:cs typeface="맑은 고딕" charset="0"/>
@@ -11597,7 +13270,7 @@
                         <a:buNone/>
                       </a:pPr>
                       <a:r>
-                        <a:rPr lang="en-US" sz="700" dirty="0">
+                        <a:rPr lang="en-US" sz="800" dirty="0">
                           <a:solidFill>
                             <a:srgbClr val="2B2B2B"/>
                           </a:solidFill>
@@ -11607,7 +13280,7 @@
                         </a:rPr>
                         <a:t>150,000,000,000</a:t>
                       </a:r>
-                      <a:endParaRPr lang="en-US" sz="700" dirty="0">
+                      <a:endParaRPr lang="en-US" sz="800" dirty="0">
                         <a:latin typeface="맑은 고딕" charset="0"/>
                         <a:ea typeface="맑은 고딕" charset="0"/>
                         <a:cs typeface="맑은 고딕" charset="0"/>
@@ -11665,7 +13338,7 @@
                         <a:buNone/>
                       </a:pPr>
                       <a:r>
-                        <a:rPr lang="en-US" sz="700" dirty="0">
+                        <a:rPr lang="en-US" sz="800" dirty="0">
                           <a:solidFill>
                             <a:srgbClr val="2B2B2B"/>
                           </a:solidFill>
@@ -11675,7 +13348,7 @@
                         </a:rPr>
                         <a:t>1,250,000,000</a:t>
                       </a:r>
-                      <a:endParaRPr lang="en-US" sz="700" dirty="0">
+                      <a:endParaRPr lang="en-US" sz="800" dirty="0">
                         <a:latin typeface="맑은 고딕" charset="0"/>
                         <a:ea typeface="맑은 고딕" charset="0"/>
                         <a:cs typeface="맑은 고딕" charset="0"/>
@@ -11801,7 +13474,7 @@
                         <a:buNone/>
                       </a:pPr>
                       <a:r>
-                        <a:rPr lang="en-US" sz="700" dirty="0">
+                        <a:rPr lang="en-US" sz="800" dirty="0">
                           <a:solidFill>
                             <a:srgbClr val="2B2B2B"/>
                           </a:solidFill>
@@ -11811,7 +13484,7 @@
                         </a:rPr>
                         <a:t>1,400,000,000</a:t>
                       </a:r>
-                      <a:endParaRPr lang="en-US" sz="700" dirty="0">
+                      <a:endParaRPr lang="en-US" sz="800" dirty="0">
                         <a:latin typeface="맑은 고딕" charset="0"/>
                         <a:ea typeface="맑은 고딕" charset="0"/>
                         <a:cs typeface="맑은 고딕" charset="0"/>
@@ -11929,7 +13602,7 @@
                   </a:tcPr>
                 </a:tc>
               </a:tr>
-              <a:tr h="258184">
+              <a:tr h="259259">
                 <a:tc>
                   <a:txBody>
                     <a:bodyPr/>
@@ -11939,9 +13612,9 @@
                         <a:buNone/>
                       </a:pPr>
                       <a:r>
-                        <a:rPr lang="en-US" sz="800" dirty="0">
-                          <a:solidFill>
-                            <a:srgbClr val="2B2B2B"/>
+                        <a:rPr lang="en-US" sz="800" b="1" dirty="0">
+                          <a:solidFill>
+                            <a:srgbClr val="10161F"/>
                           </a:solidFill>
                           <a:latin typeface="맑은 고딕" pitchFamily="34" charset="0"/>
                           <a:ea typeface="맑은 고딕" pitchFamily="34" charset="-122"/>
@@ -11994,7 +13667,7 @@
                       <a:tailEnd type="none" w="med" len="med"/>
                     </a:lnB>
                     <a:solidFill>
-                      <a:srgbClr val="F3F6F7"/>
+                      <a:srgbClr val="F5F7F9"/>
                     </a:solidFill>
                   </a:tcPr>
                 </a:tc>
@@ -12006,52 +13679,63 @@
                       <a:pPr algn="l" indent="0" marL="0">
                         <a:buNone/>
                       </a:pPr>
-                      <a:endParaRPr lang="en-US" sz="800" dirty="0">
-                        <a:latin typeface="맑은 고딕" charset="0"/>
-                        <a:ea typeface="맑은 고딕" charset="0"/>
-                        <a:cs typeface="맑은 고딕" charset="0"/>
-                      </a:endParaRPr>
-                    </a:p>
-                  </a:txBody>
-                  <a:tcPr marL="50800" marR="50800" marT="25400" marB="25400" anchor="ctr">
-                    <a:lnL w="3810" cap="flat" cmpd="sng" algn="ctr">
-                      <a:solidFill>
-                        <a:srgbClr val="DDE3E8"/>
-                      </a:solidFill>
-                      <a:prstDash val="solid"/>
-                      <a:round/>
-                      <a:headEnd type="none" w="med" len="med"/>
-                      <a:tailEnd type="none" w="med" len="med"/>
-                    </a:lnL>
-                    <a:lnR w="3810" cap="flat" cmpd="sng" algn="ctr">
-                      <a:solidFill>
-                        <a:srgbClr val="DDE3E8"/>
-                      </a:solidFill>
-                      <a:prstDash val="solid"/>
-                      <a:round/>
-                      <a:headEnd type="none" w="med" len="med"/>
-                      <a:tailEnd type="none" w="med" len="med"/>
-                    </a:lnR>
-                    <a:lnT w="3810" cap="flat" cmpd="sng" algn="ctr">
-                      <a:solidFill>
-                        <a:srgbClr val="DDE3E8"/>
-                      </a:solidFill>
-                      <a:prstDash val="solid"/>
-                      <a:round/>
-                      <a:headEnd type="none" w="med" len="med"/>
-                      <a:tailEnd type="none" w="med" len="med"/>
-                    </a:lnT>
-                    <a:lnB w="3810" cap="flat" cmpd="sng" algn="ctr">
-                      <a:solidFill>
-                        <a:srgbClr val="DDE3E8"/>
-                      </a:solidFill>
-                      <a:prstDash val="solid"/>
-                      <a:round/>
-                      <a:headEnd type="none" w="med" len="med"/>
-                      <a:tailEnd type="none" w="med" len="med"/>
-                    </a:lnB>
-                    <a:solidFill>
-                      <a:srgbClr val="F3F6F7"/>
+                      <a:r>
+                        <a:rPr lang="en-US" sz="800" b="1" dirty="0">
+                          <a:solidFill>
+                            <a:srgbClr val="10161F"/>
+                          </a:solidFill>
+                          <a:latin typeface="맑은 고딕" pitchFamily="34" charset="0"/>
+                          <a:ea typeface="맑은 고딕" pitchFamily="34" charset="-122"/>
+                          <a:cs typeface="맑은 고딕" pitchFamily="34" charset="-120"/>
+                        </a:rPr>
+                        <a:t>15개 호실</a:t>
+                      </a:r>
+                      <a:endParaRPr lang="en-US" sz="800" dirty="0">
+                        <a:latin typeface="맑은 고딕" charset="0"/>
+                        <a:ea typeface="맑은 고딕" charset="0"/>
+                        <a:cs typeface="맑은 고딕" charset="0"/>
+                      </a:endParaRPr>
+                    </a:p>
+                  </a:txBody>
+                  <a:tcPr marL="50800" marR="50800" marT="25400" marB="25400" anchor="ctr">
+                    <a:lnL w="3810" cap="flat" cmpd="sng" algn="ctr">
+                      <a:solidFill>
+                        <a:srgbClr val="DDE3E8"/>
+                      </a:solidFill>
+                      <a:prstDash val="solid"/>
+                      <a:round/>
+                      <a:headEnd type="none" w="med" len="med"/>
+                      <a:tailEnd type="none" w="med" len="med"/>
+                    </a:lnL>
+                    <a:lnR w="3810" cap="flat" cmpd="sng" algn="ctr">
+                      <a:solidFill>
+                        <a:srgbClr val="DDE3E8"/>
+                      </a:solidFill>
+                      <a:prstDash val="solid"/>
+                      <a:round/>
+                      <a:headEnd type="none" w="med" len="med"/>
+                      <a:tailEnd type="none" w="med" len="med"/>
+                    </a:lnR>
+                    <a:lnT w="3810" cap="flat" cmpd="sng" algn="ctr">
+                      <a:solidFill>
+                        <a:srgbClr val="DDE3E8"/>
+                      </a:solidFill>
+                      <a:prstDash val="solid"/>
+                      <a:round/>
+                      <a:headEnd type="none" w="med" len="med"/>
+                      <a:tailEnd type="none" w="med" len="med"/>
+                    </a:lnT>
+                    <a:lnB w="3810" cap="flat" cmpd="sng" algn="ctr">
+                      <a:solidFill>
+                        <a:srgbClr val="DDE3E8"/>
+                      </a:solidFill>
+                      <a:prstDash val="solid"/>
+                      <a:round/>
+                      <a:headEnd type="none" w="med" len="med"/>
+                      <a:tailEnd type="none" w="med" len="med"/>
+                    </a:lnB>
+                    <a:solidFill>
+                      <a:srgbClr val="F5F7F9"/>
                     </a:solidFill>
                   </a:tcPr>
                 </a:tc>
@@ -12063,52 +13747,63 @@
                       <a:pPr algn="ctr" indent="0" marL="0">
                         <a:buNone/>
                       </a:pPr>
-                      <a:endParaRPr lang="en-US" sz="800" dirty="0">
-                        <a:latin typeface="맑은 고딕" charset="0"/>
-                        <a:ea typeface="맑은 고딕" charset="0"/>
-                        <a:cs typeface="맑은 고딕" charset="0"/>
-                      </a:endParaRPr>
-                    </a:p>
-                  </a:txBody>
-                  <a:tcPr marL="50800" marR="50800" marT="25400" marB="25400" anchor="ctr">
-                    <a:lnL w="3810" cap="flat" cmpd="sng" algn="ctr">
-                      <a:solidFill>
-                        <a:srgbClr val="DDE3E8"/>
-                      </a:solidFill>
-                      <a:prstDash val="solid"/>
-                      <a:round/>
-                      <a:headEnd type="none" w="med" len="med"/>
-                      <a:tailEnd type="none" w="med" len="med"/>
-                    </a:lnL>
-                    <a:lnR w="3810" cap="flat" cmpd="sng" algn="ctr">
-                      <a:solidFill>
-                        <a:srgbClr val="DDE3E8"/>
-                      </a:solidFill>
-                      <a:prstDash val="solid"/>
-                      <a:round/>
-                      <a:headEnd type="none" w="med" len="med"/>
-                      <a:tailEnd type="none" w="med" len="med"/>
-                    </a:lnR>
-                    <a:lnT w="3810" cap="flat" cmpd="sng" algn="ctr">
-                      <a:solidFill>
-                        <a:srgbClr val="DDE3E8"/>
-                      </a:solidFill>
-                      <a:prstDash val="solid"/>
-                      <a:round/>
-                      <a:headEnd type="none" w="med" len="med"/>
-                      <a:tailEnd type="none" w="med" len="med"/>
-                    </a:lnT>
-                    <a:lnB w="3810" cap="flat" cmpd="sng" algn="ctr">
-                      <a:solidFill>
-                        <a:srgbClr val="DDE3E8"/>
-                      </a:solidFill>
-                      <a:prstDash val="solid"/>
-                      <a:round/>
-                      <a:headEnd type="none" w="med" len="med"/>
-                      <a:tailEnd type="none" w="med" len="med"/>
-                    </a:lnB>
-                    <a:solidFill>
-                      <a:srgbClr val="F3F6F7"/>
+                      <a:r>
+                        <a:rPr lang="en-US" sz="800" b="1" dirty="0">
+                          <a:solidFill>
+                            <a:srgbClr val="10161F"/>
+                          </a:solidFill>
+                          <a:latin typeface="맑은 고딕" pitchFamily="34" charset="0"/>
+                          <a:ea typeface="맑은 고딕" pitchFamily="34" charset="-122"/>
+                          <a:cs typeface="맑은 고딕" pitchFamily="34" charset="-120"/>
+                        </a:rPr>
+                        <a:t>-</a:t>
+                      </a:r>
+                      <a:endParaRPr lang="en-US" sz="800" dirty="0">
+                        <a:latin typeface="맑은 고딕" charset="0"/>
+                        <a:ea typeface="맑은 고딕" charset="0"/>
+                        <a:cs typeface="맑은 고딕" charset="0"/>
+                      </a:endParaRPr>
+                    </a:p>
+                  </a:txBody>
+                  <a:tcPr marL="50800" marR="50800" marT="25400" marB="25400" anchor="ctr">
+                    <a:lnL w="3810" cap="flat" cmpd="sng" algn="ctr">
+                      <a:solidFill>
+                        <a:srgbClr val="DDE3E8"/>
+                      </a:solidFill>
+                      <a:prstDash val="solid"/>
+                      <a:round/>
+                      <a:headEnd type="none" w="med" len="med"/>
+                      <a:tailEnd type="none" w="med" len="med"/>
+                    </a:lnL>
+                    <a:lnR w="3810" cap="flat" cmpd="sng" algn="ctr">
+                      <a:solidFill>
+                        <a:srgbClr val="DDE3E8"/>
+                      </a:solidFill>
+                      <a:prstDash val="solid"/>
+                      <a:round/>
+                      <a:headEnd type="none" w="med" len="med"/>
+                      <a:tailEnd type="none" w="med" len="med"/>
+                    </a:lnR>
+                    <a:lnT w="3810" cap="flat" cmpd="sng" algn="ctr">
+                      <a:solidFill>
+                        <a:srgbClr val="DDE3E8"/>
+                      </a:solidFill>
+                      <a:prstDash val="solid"/>
+                      <a:round/>
+                      <a:headEnd type="none" w="med" len="med"/>
+                      <a:tailEnd type="none" w="med" len="med"/>
+                    </a:lnT>
+                    <a:lnB w="3810" cap="flat" cmpd="sng" algn="ctr">
+                      <a:solidFill>
+                        <a:srgbClr val="DDE3E8"/>
+                      </a:solidFill>
+                      <a:prstDash val="solid"/>
+                      <a:round/>
+                      <a:headEnd type="none" w="med" len="med"/>
+                      <a:tailEnd type="none" w="med" len="med"/>
+                    </a:lnB>
+                    <a:solidFill>
+                      <a:srgbClr val="F5F7F9"/>
                     </a:solidFill>
                   </a:tcPr>
                 </a:tc>
@@ -12121,62 +13816,62 @@
                         <a:buNone/>
                       </a:pPr>
                       <a:r>
-                        <a:rPr lang="en-US" sz="800" dirty="0">
-                          <a:solidFill>
-                            <a:srgbClr val="2B2B2B"/>
-                          </a:solidFill>
-                          <a:latin typeface="맑은 고딕" pitchFamily="34" charset="0"/>
-                          <a:ea typeface="맑은 고딕" pitchFamily="34" charset="-122"/>
-                          <a:cs typeface="맑은 고딕" pitchFamily="34" charset="-120"/>
-                        </a:rPr>
-                        <a:t>15개 호실</a:t>
-                      </a:r>
-                      <a:endParaRPr lang="en-US" sz="800" dirty="0">
-                        <a:latin typeface="맑은 고딕" charset="0"/>
-                        <a:ea typeface="맑은 고딕" charset="0"/>
-                        <a:cs typeface="맑은 고딕" charset="0"/>
-                      </a:endParaRPr>
-                    </a:p>
-                  </a:txBody>
-                  <a:tcPr marL="50800" marR="50800" marT="25400" marB="25400" anchor="ctr">
-                    <a:lnL w="3810" cap="flat" cmpd="sng" algn="ctr">
-                      <a:solidFill>
-                        <a:srgbClr val="DDE3E8"/>
-                      </a:solidFill>
-                      <a:prstDash val="solid"/>
-                      <a:round/>
-                      <a:headEnd type="none" w="med" len="med"/>
-                      <a:tailEnd type="none" w="med" len="med"/>
-                    </a:lnL>
-                    <a:lnR w="3810" cap="flat" cmpd="sng" algn="ctr">
-                      <a:solidFill>
-                        <a:srgbClr val="DDE3E8"/>
-                      </a:solidFill>
-                      <a:prstDash val="solid"/>
-                      <a:round/>
-                      <a:headEnd type="none" w="med" len="med"/>
-                      <a:tailEnd type="none" w="med" len="med"/>
-                    </a:lnR>
-                    <a:lnT w="3810" cap="flat" cmpd="sng" algn="ctr">
-                      <a:solidFill>
-                        <a:srgbClr val="DDE3E8"/>
-                      </a:solidFill>
-                      <a:prstDash val="solid"/>
-                      <a:round/>
-                      <a:headEnd type="none" w="med" len="med"/>
-                      <a:tailEnd type="none" w="med" len="med"/>
-                    </a:lnT>
-                    <a:lnB w="3810" cap="flat" cmpd="sng" algn="ctr">
-                      <a:solidFill>
-                        <a:srgbClr val="DDE3E8"/>
-                      </a:solidFill>
-                      <a:prstDash val="solid"/>
-                      <a:round/>
-                      <a:headEnd type="none" w="med" len="med"/>
-                      <a:tailEnd type="none" w="med" len="med"/>
-                    </a:lnB>
-                    <a:solidFill>
-                      <a:srgbClr val="F3F6F7"/>
+                        <a:rPr lang="en-US" sz="800" b="1" dirty="0">
+                          <a:solidFill>
+                            <a:srgbClr val="10161F"/>
+                          </a:solidFill>
+                          <a:latin typeface="맑은 고딕" pitchFamily="34" charset="0"/>
+                          <a:ea typeface="맑은 고딕" pitchFamily="34" charset="-122"/>
+                          <a:cs typeface="맑은 고딕" pitchFamily="34" charset="-120"/>
+                        </a:rPr>
+                        <a:t>18,757.5</a:t>
+                      </a:r>
+                      <a:endParaRPr lang="en-US" sz="800" dirty="0">
+                        <a:latin typeface="맑은 고딕" charset="0"/>
+                        <a:ea typeface="맑은 고딕" charset="0"/>
+                        <a:cs typeface="맑은 고딕" charset="0"/>
+                      </a:endParaRPr>
+                    </a:p>
+                  </a:txBody>
+                  <a:tcPr marL="50800" marR="50800" marT="25400" marB="25400" anchor="ctr">
+                    <a:lnL w="3810" cap="flat" cmpd="sng" algn="ctr">
+                      <a:solidFill>
+                        <a:srgbClr val="DDE3E8"/>
+                      </a:solidFill>
+                      <a:prstDash val="solid"/>
+                      <a:round/>
+                      <a:headEnd type="none" w="med" len="med"/>
+                      <a:tailEnd type="none" w="med" len="med"/>
+                    </a:lnL>
+                    <a:lnR w="3810" cap="flat" cmpd="sng" algn="ctr">
+                      <a:solidFill>
+                        <a:srgbClr val="DDE3E8"/>
+                      </a:solidFill>
+                      <a:prstDash val="solid"/>
+                      <a:round/>
+                      <a:headEnd type="none" w="med" len="med"/>
+                      <a:tailEnd type="none" w="med" len="med"/>
+                    </a:lnR>
+                    <a:lnT w="3810" cap="flat" cmpd="sng" algn="ctr">
+                      <a:solidFill>
+                        <a:srgbClr val="DDE3E8"/>
+                      </a:solidFill>
+                      <a:prstDash val="solid"/>
+                      <a:round/>
+                      <a:headEnd type="none" w="med" len="med"/>
+                      <a:tailEnd type="none" w="med" len="med"/>
+                    </a:lnT>
+                    <a:lnB w="3810" cap="flat" cmpd="sng" algn="ctr">
+                      <a:solidFill>
+                        <a:srgbClr val="DDE3E8"/>
+                      </a:solidFill>
+                      <a:prstDash val="solid"/>
+                      <a:round/>
+                      <a:headEnd type="none" w="med" len="med"/>
+                      <a:tailEnd type="none" w="med" len="med"/>
+                    </a:lnB>
+                    <a:solidFill>
+                      <a:srgbClr val="F5F7F9"/>
                     </a:solidFill>
                   </a:tcPr>
                 </a:tc>
@@ -12189,62 +13884,62 @@
                         <a:buNone/>
                       </a:pPr>
                       <a:r>
-                        <a:rPr lang="en-US" sz="800" dirty="0">
-                          <a:solidFill>
-                            <a:srgbClr val="2B2B2B"/>
-                          </a:solidFill>
-                          <a:latin typeface="맑은 고딕" pitchFamily="34" charset="0"/>
-                          <a:ea typeface="맑은 고딕" pitchFamily="34" charset="-122"/>
-                          <a:cs typeface="맑은 고딕" pitchFamily="34" charset="-120"/>
-                        </a:rPr>
-                        <a:t>11254.5</a:t>
-                      </a:r>
-                      <a:endParaRPr lang="en-US" sz="800" dirty="0">
-                        <a:latin typeface="맑은 고딕" charset="0"/>
-                        <a:ea typeface="맑은 고딕" charset="0"/>
-                        <a:cs typeface="맑은 고딕" charset="0"/>
-                      </a:endParaRPr>
-                    </a:p>
-                  </a:txBody>
-                  <a:tcPr marL="50800" marR="50800" marT="25400" marB="25400" anchor="ctr">
-                    <a:lnL w="3810" cap="flat" cmpd="sng" algn="ctr">
-                      <a:solidFill>
-                        <a:srgbClr val="DDE3E8"/>
-                      </a:solidFill>
-                      <a:prstDash val="solid"/>
-                      <a:round/>
-                      <a:headEnd type="none" w="med" len="med"/>
-                      <a:tailEnd type="none" w="med" len="med"/>
-                    </a:lnL>
-                    <a:lnR w="3810" cap="flat" cmpd="sng" algn="ctr">
-                      <a:solidFill>
-                        <a:srgbClr val="DDE3E8"/>
-                      </a:solidFill>
-                      <a:prstDash val="solid"/>
-                      <a:round/>
-                      <a:headEnd type="none" w="med" len="med"/>
-                      <a:tailEnd type="none" w="med" len="med"/>
-                    </a:lnR>
-                    <a:lnT w="3810" cap="flat" cmpd="sng" algn="ctr">
-                      <a:solidFill>
-                        <a:srgbClr val="DDE3E8"/>
-                      </a:solidFill>
-                      <a:prstDash val="solid"/>
-                      <a:round/>
-                      <a:headEnd type="none" w="med" len="med"/>
-                      <a:tailEnd type="none" w="med" len="med"/>
-                    </a:lnT>
-                    <a:lnB w="3810" cap="flat" cmpd="sng" algn="ctr">
-                      <a:solidFill>
-                        <a:srgbClr val="DDE3E8"/>
-                      </a:solidFill>
-                      <a:prstDash val="solid"/>
-                      <a:round/>
-                      <a:headEnd type="none" w="med" len="med"/>
-                      <a:tailEnd type="none" w="med" len="med"/>
-                    </a:lnB>
-                    <a:solidFill>
-                      <a:srgbClr val="F3F6F7"/>
+                        <a:rPr lang="en-US" sz="800" b="1" dirty="0">
+                          <a:solidFill>
+                            <a:srgbClr val="10161F"/>
+                          </a:solidFill>
+                          <a:latin typeface="맑은 고딕" pitchFamily="34" charset="0"/>
+                          <a:ea typeface="맑은 고딕" pitchFamily="34" charset="-122"/>
+                          <a:cs typeface="맑은 고딕" pitchFamily="34" charset="-120"/>
+                        </a:rPr>
+                        <a:t>11,254.5</a:t>
+                      </a:r>
+                      <a:endParaRPr lang="en-US" sz="800" dirty="0">
+                        <a:latin typeface="맑은 고딕" charset="0"/>
+                        <a:ea typeface="맑은 고딕" charset="0"/>
+                        <a:cs typeface="맑은 고딕" charset="0"/>
+                      </a:endParaRPr>
+                    </a:p>
+                  </a:txBody>
+                  <a:tcPr marL="50800" marR="50800" marT="25400" marB="25400" anchor="ctr">
+                    <a:lnL w="3810" cap="flat" cmpd="sng" algn="ctr">
+                      <a:solidFill>
+                        <a:srgbClr val="DDE3E8"/>
+                      </a:solidFill>
+                      <a:prstDash val="solid"/>
+                      <a:round/>
+                      <a:headEnd type="none" w="med" len="med"/>
+                      <a:tailEnd type="none" w="med" len="med"/>
+                    </a:lnL>
+                    <a:lnR w="3810" cap="flat" cmpd="sng" algn="ctr">
+                      <a:solidFill>
+                        <a:srgbClr val="DDE3E8"/>
+                      </a:solidFill>
+                      <a:prstDash val="solid"/>
+                      <a:round/>
+                      <a:headEnd type="none" w="med" len="med"/>
+                      <a:tailEnd type="none" w="med" len="med"/>
+                    </a:lnR>
+                    <a:lnT w="3810" cap="flat" cmpd="sng" algn="ctr">
+                      <a:solidFill>
+                        <a:srgbClr val="DDE3E8"/>
+                      </a:solidFill>
+                      <a:prstDash val="solid"/>
+                      <a:round/>
+                      <a:headEnd type="none" w="med" len="med"/>
+                      <a:tailEnd type="none" w="med" len="med"/>
+                    </a:lnT>
+                    <a:lnB w="3810" cap="flat" cmpd="sng" algn="ctr">
+                      <a:solidFill>
+                        <a:srgbClr val="DDE3E8"/>
+                      </a:solidFill>
+                      <a:prstDash val="solid"/>
+                      <a:round/>
+                      <a:headEnd type="none" w="med" len="med"/>
+                      <a:tailEnd type="none" w="med" len="med"/>
+                    </a:lnB>
+                    <a:solidFill>
+                      <a:srgbClr val="F5F7F9"/>
                     </a:solidFill>
                   </a:tcPr>
                 </a:tc>
@@ -12257,62 +13952,62 @@
                         <a:buNone/>
                       </a:pPr>
                       <a:r>
-                        <a:rPr lang="en-US" sz="700" dirty="0">
-                          <a:solidFill>
-                            <a:srgbClr val="2B2B2B"/>
-                          </a:solidFill>
-                          <a:latin typeface="맑은 고딕" pitchFamily="34" charset="0"/>
-                          <a:ea typeface="맑은 고딕" pitchFamily="34" charset="-122"/>
-                          <a:cs typeface="맑은 고딕" pitchFamily="34" charset="-120"/>
-                        </a:rPr>
-                        <a:t>2250000000000.0</a:t>
-                      </a:r>
-                      <a:endParaRPr lang="en-US" sz="700" dirty="0">
-                        <a:latin typeface="맑은 고딕" charset="0"/>
-                        <a:ea typeface="맑은 고딕" charset="0"/>
-                        <a:cs typeface="맑은 고딕" charset="0"/>
-                      </a:endParaRPr>
-                    </a:p>
-                  </a:txBody>
-                  <a:tcPr marL="50800" marR="50800" marT="25400" marB="25400" anchor="ctr">
-                    <a:lnL w="3810" cap="flat" cmpd="sng" algn="ctr">
-                      <a:solidFill>
-                        <a:srgbClr val="DDE3E8"/>
-                      </a:solidFill>
-                      <a:prstDash val="solid"/>
-                      <a:round/>
-                      <a:headEnd type="none" w="med" len="med"/>
-                      <a:tailEnd type="none" w="med" len="med"/>
-                    </a:lnL>
-                    <a:lnR w="3810" cap="flat" cmpd="sng" algn="ctr">
-                      <a:solidFill>
-                        <a:srgbClr val="DDE3E8"/>
-                      </a:solidFill>
-                      <a:prstDash val="solid"/>
-                      <a:round/>
-                      <a:headEnd type="none" w="med" len="med"/>
-                      <a:tailEnd type="none" w="med" len="med"/>
-                    </a:lnR>
-                    <a:lnT w="3810" cap="flat" cmpd="sng" algn="ctr">
-                      <a:solidFill>
-                        <a:srgbClr val="DDE3E8"/>
-                      </a:solidFill>
-                      <a:prstDash val="solid"/>
-                      <a:round/>
-                      <a:headEnd type="none" w="med" len="med"/>
-                      <a:tailEnd type="none" w="med" len="med"/>
-                    </a:lnT>
-                    <a:lnB w="3810" cap="flat" cmpd="sng" algn="ctr">
-                      <a:solidFill>
-                        <a:srgbClr val="DDE3E8"/>
-                      </a:solidFill>
-                      <a:prstDash val="solid"/>
-                      <a:round/>
-                      <a:headEnd type="none" w="med" len="med"/>
-                      <a:tailEnd type="none" w="med" len="med"/>
-                    </a:lnB>
-                    <a:solidFill>
-                      <a:srgbClr val="F3F6F7"/>
+                        <a:rPr lang="en-US" sz="800" b="1" dirty="0">
+                          <a:solidFill>
+                            <a:srgbClr val="10161F"/>
+                          </a:solidFill>
+                          <a:latin typeface="맑은 고딕" pitchFamily="34" charset="0"/>
+                          <a:ea typeface="맑은 고딕" pitchFamily="34" charset="-122"/>
+                          <a:cs typeface="맑은 고딕" pitchFamily="34" charset="-120"/>
+                        </a:rPr>
+                        <a:t>2,250,000,000,000</a:t>
+                      </a:r>
+                      <a:endParaRPr lang="en-US" sz="800" dirty="0">
+                        <a:latin typeface="맑은 고딕" charset="0"/>
+                        <a:ea typeface="맑은 고딕" charset="0"/>
+                        <a:cs typeface="맑은 고딕" charset="0"/>
+                      </a:endParaRPr>
+                    </a:p>
+                  </a:txBody>
+                  <a:tcPr marL="50800" marR="50800" marT="25400" marB="25400" anchor="ctr">
+                    <a:lnL w="3810" cap="flat" cmpd="sng" algn="ctr">
+                      <a:solidFill>
+                        <a:srgbClr val="DDE3E8"/>
+                      </a:solidFill>
+                      <a:prstDash val="solid"/>
+                      <a:round/>
+                      <a:headEnd type="none" w="med" len="med"/>
+                      <a:tailEnd type="none" w="med" len="med"/>
+                    </a:lnL>
+                    <a:lnR w="3810" cap="flat" cmpd="sng" algn="ctr">
+                      <a:solidFill>
+                        <a:srgbClr val="DDE3E8"/>
+                      </a:solidFill>
+                      <a:prstDash val="solid"/>
+                      <a:round/>
+                      <a:headEnd type="none" w="med" len="med"/>
+                      <a:tailEnd type="none" w="med" len="med"/>
+                    </a:lnR>
+                    <a:lnT w="3810" cap="flat" cmpd="sng" algn="ctr">
+                      <a:solidFill>
+                        <a:srgbClr val="DDE3E8"/>
+                      </a:solidFill>
+                      <a:prstDash val="solid"/>
+                      <a:round/>
+                      <a:headEnd type="none" w="med" len="med"/>
+                      <a:tailEnd type="none" w="med" len="med"/>
+                    </a:lnT>
+                    <a:lnB w="3810" cap="flat" cmpd="sng" algn="ctr">
+                      <a:solidFill>
+                        <a:srgbClr val="DDE3E8"/>
+                      </a:solidFill>
+                      <a:prstDash val="solid"/>
+                      <a:round/>
+                      <a:headEnd type="none" w="med" len="med"/>
+                      <a:tailEnd type="none" w="med" len="med"/>
+                    </a:lnB>
+                    <a:solidFill>
+                      <a:srgbClr val="F5F7F9"/>
                     </a:solidFill>
                   </a:tcPr>
                 </a:tc>
@@ -12325,62 +14020,62 @@
                         <a:buNone/>
                       </a:pPr>
                       <a:r>
-                        <a:rPr lang="en-US" sz="700" dirty="0">
-                          <a:solidFill>
-                            <a:srgbClr val="2B2B2B"/>
-                          </a:solidFill>
-                          <a:latin typeface="맑은 고딕" pitchFamily="34" charset="0"/>
-                          <a:ea typeface="맑은 고딕" pitchFamily="34" charset="-122"/>
-                          <a:cs typeface="맑은 고딕" pitchFamily="34" charset="-120"/>
-                        </a:rPr>
-                        <a:t>19992003199%</a:t>
-                      </a:r>
-                      <a:endParaRPr lang="en-US" sz="700" dirty="0">
-                        <a:latin typeface="맑은 고딕" charset="0"/>
-                        <a:ea typeface="맑은 고딕" charset="0"/>
-                        <a:cs typeface="맑은 고딕" charset="0"/>
-                      </a:endParaRPr>
-                    </a:p>
-                  </a:txBody>
-                  <a:tcPr marL="50800" marR="50800" marT="25400" marB="25400" anchor="ctr">
-                    <a:lnL w="3810" cap="flat" cmpd="sng" algn="ctr">
-                      <a:solidFill>
-                        <a:srgbClr val="DDE3E8"/>
-                      </a:solidFill>
-                      <a:prstDash val="solid"/>
-                      <a:round/>
-                      <a:headEnd type="none" w="med" len="med"/>
-                      <a:tailEnd type="none" w="med" len="med"/>
-                    </a:lnL>
-                    <a:lnR w="3810" cap="flat" cmpd="sng" algn="ctr">
-                      <a:solidFill>
-                        <a:srgbClr val="DDE3E8"/>
-                      </a:solidFill>
-                      <a:prstDash val="solid"/>
-                      <a:round/>
-                      <a:headEnd type="none" w="med" len="med"/>
-                      <a:tailEnd type="none" w="med" len="med"/>
-                    </a:lnR>
-                    <a:lnT w="3810" cap="flat" cmpd="sng" algn="ctr">
-                      <a:solidFill>
-                        <a:srgbClr val="DDE3E8"/>
-                      </a:solidFill>
-                      <a:prstDash val="solid"/>
-                      <a:round/>
-                      <a:headEnd type="none" w="med" len="med"/>
-                      <a:tailEnd type="none" w="med" len="med"/>
-                    </a:lnT>
-                    <a:lnB w="3810" cap="flat" cmpd="sng" algn="ctr">
-                      <a:solidFill>
-                        <a:srgbClr val="DDE3E8"/>
-                      </a:solidFill>
-                      <a:prstDash val="solid"/>
-                      <a:round/>
-                      <a:headEnd type="none" w="med" len="med"/>
-                      <a:tailEnd type="none" w="med" len="med"/>
-                    </a:lnB>
-                    <a:solidFill>
-                      <a:srgbClr val="F3F6F7"/>
+                        <a:rPr lang="en-US" sz="800" b="1" dirty="0">
+                          <a:solidFill>
+                            <a:srgbClr val="10161F"/>
+                          </a:solidFill>
+                          <a:latin typeface="맑은 고딕" pitchFamily="34" charset="0"/>
+                          <a:ea typeface="맑은 고딕" pitchFamily="34" charset="-122"/>
+                          <a:cs typeface="맑은 고딕" pitchFamily="34" charset="-120"/>
+                        </a:rPr>
+                        <a:t>18,750,000,000</a:t>
+                      </a:r>
+                      <a:endParaRPr lang="en-US" sz="800" dirty="0">
+                        <a:latin typeface="맑은 고딕" charset="0"/>
+                        <a:ea typeface="맑은 고딕" charset="0"/>
+                        <a:cs typeface="맑은 고딕" charset="0"/>
+                      </a:endParaRPr>
+                    </a:p>
+                  </a:txBody>
+                  <a:tcPr marL="50800" marR="50800" marT="25400" marB="25400" anchor="ctr">
+                    <a:lnL w="3810" cap="flat" cmpd="sng" algn="ctr">
+                      <a:solidFill>
+                        <a:srgbClr val="DDE3E8"/>
+                      </a:solidFill>
+                      <a:prstDash val="solid"/>
+                      <a:round/>
+                      <a:headEnd type="none" w="med" len="med"/>
+                      <a:tailEnd type="none" w="med" len="med"/>
+                    </a:lnL>
+                    <a:lnR w="3810" cap="flat" cmpd="sng" algn="ctr">
+                      <a:solidFill>
+                        <a:srgbClr val="DDE3E8"/>
+                      </a:solidFill>
+                      <a:prstDash val="solid"/>
+                      <a:round/>
+                      <a:headEnd type="none" w="med" len="med"/>
+                      <a:tailEnd type="none" w="med" len="med"/>
+                    </a:lnR>
+                    <a:lnT w="3810" cap="flat" cmpd="sng" algn="ctr">
+                      <a:solidFill>
+                        <a:srgbClr val="DDE3E8"/>
+                      </a:solidFill>
+                      <a:prstDash val="solid"/>
+                      <a:round/>
+                      <a:headEnd type="none" w="med" len="med"/>
+                      <a:tailEnd type="none" w="med" len="med"/>
+                    </a:lnT>
+                    <a:lnB w="3810" cap="flat" cmpd="sng" algn="ctr">
+                      <a:solidFill>
+                        <a:srgbClr val="DDE3E8"/>
+                      </a:solidFill>
+                      <a:prstDash val="solid"/>
+                      <a:round/>
+                      <a:headEnd type="none" w="med" len="med"/>
+                      <a:tailEnd type="none" w="med" len="med"/>
+                    </a:lnB>
+                    <a:solidFill>
+                      <a:srgbClr val="F5F7F9"/>
                     </a:solidFill>
                   </a:tcPr>
                 </a:tc>
@@ -12393,9 +14088,9 @@
                         <a:buNone/>
                       </a:pPr>
                       <a:r>
-                        <a:rPr lang="en-US" sz="700" dirty="0">
-                          <a:solidFill>
-                            <a:srgbClr val="2B2B2B"/>
+                        <a:rPr lang="en-US" sz="800" b="1" dirty="0">
+                          <a:solidFill>
+                            <a:srgbClr val="10161F"/>
                           </a:solidFill>
                           <a:latin typeface="맑은 고딕" pitchFamily="34" charset="0"/>
                           <a:ea typeface="맑은 고딕" pitchFamily="34" charset="-122"/>
@@ -12403,52 +14098,52 @@
                         </a:rPr>
                         <a:t>2,250,000,000</a:t>
                       </a:r>
-                      <a:endParaRPr lang="en-US" sz="700" dirty="0">
-                        <a:latin typeface="맑은 고딕" charset="0"/>
-                        <a:ea typeface="맑은 고딕" charset="0"/>
-                        <a:cs typeface="맑은 고딕" charset="0"/>
-                      </a:endParaRPr>
-                    </a:p>
-                  </a:txBody>
-                  <a:tcPr marL="50800" marR="50800" marT="25400" marB="25400" anchor="ctr">
-                    <a:lnL w="3810" cap="flat" cmpd="sng" algn="ctr">
-                      <a:solidFill>
-                        <a:srgbClr val="DDE3E8"/>
-                      </a:solidFill>
-                      <a:prstDash val="solid"/>
-                      <a:round/>
-                      <a:headEnd type="none" w="med" len="med"/>
-                      <a:tailEnd type="none" w="med" len="med"/>
-                    </a:lnL>
-                    <a:lnR w="3810" cap="flat" cmpd="sng" algn="ctr">
-                      <a:solidFill>
-                        <a:srgbClr val="DDE3E8"/>
-                      </a:solidFill>
-                      <a:prstDash val="solid"/>
-                      <a:round/>
-                      <a:headEnd type="none" w="med" len="med"/>
-                      <a:tailEnd type="none" w="med" len="med"/>
-                    </a:lnR>
-                    <a:lnT w="3810" cap="flat" cmpd="sng" algn="ctr">
-                      <a:solidFill>
-                        <a:srgbClr val="DDE3E8"/>
-                      </a:solidFill>
-                      <a:prstDash val="solid"/>
-                      <a:round/>
-                      <a:headEnd type="none" w="med" len="med"/>
-                      <a:tailEnd type="none" w="med" len="med"/>
-                    </a:lnT>
-                    <a:lnB w="3810" cap="flat" cmpd="sng" algn="ctr">
-                      <a:solidFill>
-                        <a:srgbClr val="DDE3E8"/>
-                      </a:solidFill>
-                      <a:prstDash val="solid"/>
-                      <a:round/>
-                      <a:headEnd type="none" w="med" len="med"/>
-                      <a:tailEnd type="none" w="med" len="med"/>
-                    </a:lnB>
-                    <a:solidFill>
-                      <a:srgbClr val="F3F6F7"/>
+                      <a:endParaRPr lang="en-US" sz="800" dirty="0">
+                        <a:latin typeface="맑은 고딕" charset="0"/>
+                        <a:ea typeface="맑은 고딕" charset="0"/>
+                        <a:cs typeface="맑은 고딕" charset="0"/>
+                      </a:endParaRPr>
+                    </a:p>
+                  </a:txBody>
+                  <a:tcPr marL="50800" marR="50800" marT="25400" marB="25400" anchor="ctr">
+                    <a:lnL w="3810" cap="flat" cmpd="sng" algn="ctr">
+                      <a:solidFill>
+                        <a:srgbClr val="DDE3E8"/>
+                      </a:solidFill>
+                      <a:prstDash val="solid"/>
+                      <a:round/>
+                      <a:headEnd type="none" w="med" len="med"/>
+                      <a:tailEnd type="none" w="med" len="med"/>
+                    </a:lnL>
+                    <a:lnR w="3810" cap="flat" cmpd="sng" algn="ctr">
+                      <a:solidFill>
+                        <a:srgbClr val="DDE3E8"/>
+                      </a:solidFill>
+                      <a:prstDash val="solid"/>
+                      <a:round/>
+                      <a:headEnd type="none" w="med" len="med"/>
+                      <a:tailEnd type="none" w="med" len="med"/>
+                    </a:lnR>
+                    <a:lnT w="3810" cap="flat" cmpd="sng" algn="ctr">
+                      <a:solidFill>
+                        <a:srgbClr val="DDE3E8"/>
+                      </a:solidFill>
+                      <a:prstDash val="solid"/>
+                      <a:round/>
+                      <a:headEnd type="none" w="med" len="med"/>
+                      <a:tailEnd type="none" w="med" len="med"/>
+                    </a:lnT>
+                    <a:lnB w="3810" cap="flat" cmpd="sng" algn="ctr">
+                      <a:solidFill>
+                        <a:srgbClr val="DDE3E8"/>
+                      </a:solidFill>
+                      <a:prstDash val="solid"/>
+                      <a:round/>
+                      <a:headEnd type="none" w="med" len="med"/>
+                      <a:tailEnd type="none" w="med" len="med"/>
+                    </a:lnB>
+                    <a:solidFill>
+                      <a:srgbClr val="F5F7F9"/>
                     </a:solidFill>
                   </a:tcPr>
                 </a:tc>
@@ -12461,9 +14156,9 @@
                         <a:buNone/>
                       </a:pPr>
                       <a:r>
-                        <a:rPr lang="en-US" sz="700" dirty="0">
-                          <a:solidFill>
-                            <a:srgbClr val="2B2B2B"/>
+                        <a:rPr lang="en-US" sz="800" b="1" dirty="0">
+                          <a:solidFill>
+                            <a:srgbClr val="10161F"/>
                           </a:solidFill>
                           <a:latin typeface="맑은 고딕" pitchFamily="34" charset="0"/>
                           <a:ea typeface="맑은 고딕" pitchFamily="34" charset="-122"/>
@@ -12471,52 +14166,52 @@
                         </a:rPr>
                         <a:t>21,000,000,000</a:t>
                       </a:r>
-                      <a:endParaRPr lang="en-US" sz="700" dirty="0">
-                        <a:latin typeface="맑은 고딕" charset="0"/>
-                        <a:ea typeface="맑은 고딕" charset="0"/>
-                        <a:cs typeface="맑은 고딕" charset="0"/>
-                      </a:endParaRPr>
-                    </a:p>
-                  </a:txBody>
-                  <a:tcPr marL="50800" marR="50800" marT="25400" marB="25400" anchor="ctr">
-                    <a:lnL w="3810" cap="flat" cmpd="sng" algn="ctr">
-                      <a:solidFill>
-                        <a:srgbClr val="DDE3E8"/>
-                      </a:solidFill>
-                      <a:prstDash val="solid"/>
-                      <a:round/>
-                      <a:headEnd type="none" w="med" len="med"/>
-                      <a:tailEnd type="none" w="med" len="med"/>
-                    </a:lnL>
-                    <a:lnR w="3810" cap="flat" cmpd="sng" algn="ctr">
-                      <a:solidFill>
-                        <a:srgbClr val="DDE3E8"/>
-                      </a:solidFill>
-                      <a:prstDash val="solid"/>
-                      <a:round/>
-                      <a:headEnd type="none" w="med" len="med"/>
-                      <a:tailEnd type="none" w="med" len="med"/>
-                    </a:lnR>
-                    <a:lnT w="3810" cap="flat" cmpd="sng" algn="ctr">
-                      <a:solidFill>
-                        <a:srgbClr val="DDE3E8"/>
-                      </a:solidFill>
-                      <a:prstDash val="solid"/>
-                      <a:round/>
-                      <a:headEnd type="none" w="med" len="med"/>
-                      <a:tailEnd type="none" w="med" len="med"/>
-                    </a:lnT>
-                    <a:lnB w="3810" cap="flat" cmpd="sng" algn="ctr">
-                      <a:solidFill>
-                        <a:srgbClr val="DDE3E8"/>
-                      </a:solidFill>
-                      <a:prstDash val="solid"/>
-                      <a:round/>
-                      <a:headEnd type="none" w="med" len="med"/>
-                      <a:tailEnd type="none" w="med" len="med"/>
-                    </a:lnB>
-                    <a:solidFill>
-                      <a:srgbClr val="F3F6F7"/>
+                      <a:endParaRPr lang="en-US" sz="800" dirty="0">
+                        <a:latin typeface="맑은 고딕" charset="0"/>
+                        <a:ea typeface="맑은 고딕" charset="0"/>
+                        <a:cs typeface="맑은 고딕" charset="0"/>
+                      </a:endParaRPr>
+                    </a:p>
+                  </a:txBody>
+                  <a:tcPr marL="50800" marR="50800" marT="25400" marB="25400" anchor="ctr">
+                    <a:lnL w="3810" cap="flat" cmpd="sng" algn="ctr">
+                      <a:solidFill>
+                        <a:srgbClr val="DDE3E8"/>
+                      </a:solidFill>
+                      <a:prstDash val="solid"/>
+                      <a:round/>
+                      <a:headEnd type="none" w="med" len="med"/>
+                      <a:tailEnd type="none" w="med" len="med"/>
+                    </a:lnL>
+                    <a:lnR w="3810" cap="flat" cmpd="sng" algn="ctr">
+                      <a:solidFill>
+                        <a:srgbClr val="DDE3E8"/>
+                      </a:solidFill>
+                      <a:prstDash val="solid"/>
+                      <a:round/>
+                      <a:headEnd type="none" w="med" len="med"/>
+                      <a:tailEnd type="none" w="med" len="med"/>
+                    </a:lnR>
+                    <a:lnT w="3810" cap="flat" cmpd="sng" algn="ctr">
+                      <a:solidFill>
+                        <a:srgbClr val="DDE3E8"/>
+                      </a:solidFill>
+                      <a:prstDash val="solid"/>
+                      <a:round/>
+                      <a:headEnd type="none" w="med" len="med"/>
+                      <a:tailEnd type="none" w="med" len="med"/>
+                    </a:lnT>
+                    <a:lnB w="3810" cap="flat" cmpd="sng" algn="ctr">
+                      <a:solidFill>
+                        <a:srgbClr val="DDE3E8"/>
+                      </a:solidFill>
+                      <a:prstDash val="solid"/>
+                      <a:round/>
+                      <a:headEnd type="none" w="med" len="med"/>
+                      <a:tailEnd type="none" w="med" len="med"/>
+                    </a:lnB>
+                    <a:solidFill>
+                      <a:srgbClr val="F5F7F9"/>
                     </a:solidFill>
                   </a:tcPr>
                 </a:tc>
@@ -12529,62 +14224,62 @@
                         <a:buNone/>
                       </a:pPr>
                       <a:r>
-                        <a:rPr lang="en-US" sz="800" dirty="0">
-                          <a:solidFill>
-                            <a:srgbClr val="2B2B2B"/>
-                          </a:solidFill>
-                          <a:latin typeface="맑은 고딕" pitchFamily="34" charset="0"/>
-                          <a:ea typeface="맑은 고딕" pitchFamily="34" charset="-122"/>
-                          <a:cs typeface="맑은 고딕" pitchFamily="34" charset="-120"/>
-                        </a:rPr>
-                        <a:t>304,218,465</a:t>
-                      </a:r>
-                      <a:endParaRPr lang="en-US" sz="800" dirty="0">
-                        <a:latin typeface="맑은 고딕" charset="0"/>
-                        <a:ea typeface="맑은 고딕" charset="0"/>
-                        <a:cs typeface="맑은 고딕" charset="0"/>
-                      </a:endParaRPr>
-                    </a:p>
-                  </a:txBody>
-                  <a:tcPr marL="50800" marR="50800" marT="25400" marB="25400" anchor="ctr">
-                    <a:lnL w="3810" cap="flat" cmpd="sng" algn="ctr">
-                      <a:solidFill>
-                        <a:srgbClr val="DDE3E8"/>
-                      </a:solidFill>
-                      <a:prstDash val="solid"/>
-                      <a:round/>
-                      <a:headEnd type="none" w="med" len="med"/>
-                      <a:tailEnd type="none" w="med" len="med"/>
-                    </a:lnL>
-                    <a:lnR w="3810" cap="flat" cmpd="sng" algn="ctr">
-                      <a:solidFill>
-                        <a:srgbClr val="DDE3E8"/>
-                      </a:solidFill>
-                      <a:prstDash val="solid"/>
-                      <a:round/>
-                      <a:headEnd type="none" w="med" len="med"/>
-                      <a:tailEnd type="none" w="med" len="med"/>
-                    </a:lnR>
-                    <a:lnT w="3810" cap="flat" cmpd="sng" algn="ctr">
-                      <a:solidFill>
-                        <a:srgbClr val="DDE3E8"/>
-                      </a:solidFill>
-                      <a:prstDash val="solid"/>
-                      <a:round/>
-                      <a:headEnd type="none" w="med" len="med"/>
-                      <a:tailEnd type="none" w="med" len="med"/>
-                    </a:lnT>
-                    <a:lnB w="3810" cap="flat" cmpd="sng" algn="ctr">
-                      <a:solidFill>
-                        <a:srgbClr val="DDE3E8"/>
-                      </a:solidFill>
-                      <a:prstDash val="solid"/>
-                      <a:round/>
-                      <a:headEnd type="none" w="med" len="med"/>
-                      <a:tailEnd type="none" w="med" len="med"/>
-                    </a:lnB>
-                    <a:solidFill>
-                      <a:srgbClr val="F3F6F7"/>
+                        <a:rPr lang="en-US" sz="800" b="1" dirty="0">
+                          <a:solidFill>
+                            <a:srgbClr val="10161F"/>
+                          </a:solidFill>
+                          <a:latin typeface="맑은 고딕" pitchFamily="34" charset="0"/>
+                          <a:ea typeface="맑은 고딕" pitchFamily="34" charset="-122"/>
+                          <a:cs typeface="맑은 고딕" pitchFamily="34" charset="-120"/>
+                        </a:rPr>
+                        <a:t>-</a:t>
+                      </a:r>
+                      <a:endParaRPr lang="en-US" sz="800" dirty="0">
+                        <a:latin typeface="맑은 고딕" charset="0"/>
+                        <a:ea typeface="맑은 고딕" charset="0"/>
+                        <a:cs typeface="맑은 고딕" charset="0"/>
+                      </a:endParaRPr>
+                    </a:p>
+                  </a:txBody>
+                  <a:tcPr marL="50800" marR="50800" marT="25400" marB="25400" anchor="ctr">
+                    <a:lnL w="3810" cap="flat" cmpd="sng" algn="ctr">
+                      <a:solidFill>
+                        <a:srgbClr val="DDE3E8"/>
+                      </a:solidFill>
+                      <a:prstDash val="solid"/>
+                      <a:round/>
+                      <a:headEnd type="none" w="med" len="med"/>
+                      <a:tailEnd type="none" w="med" len="med"/>
+                    </a:lnL>
+                    <a:lnR w="3810" cap="flat" cmpd="sng" algn="ctr">
+                      <a:solidFill>
+                        <a:srgbClr val="DDE3E8"/>
+                      </a:solidFill>
+                      <a:prstDash val="solid"/>
+                      <a:round/>
+                      <a:headEnd type="none" w="med" len="med"/>
+                      <a:tailEnd type="none" w="med" len="med"/>
+                    </a:lnR>
+                    <a:lnT w="3810" cap="flat" cmpd="sng" algn="ctr">
+                      <a:solidFill>
+                        <a:srgbClr val="DDE3E8"/>
+                      </a:solidFill>
+                      <a:prstDash val="solid"/>
+                      <a:round/>
+                      <a:headEnd type="none" w="med" len="med"/>
+                      <a:tailEnd type="none" w="med" len="med"/>
+                    </a:lnT>
+                    <a:lnB w="3810" cap="flat" cmpd="sng" algn="ctr">
+                      <a:solidFill>
+                        <a:srgbClr val="DDE3E8"/>
+                      </a:solidFill>
+                      <a:prstDash val="solid"/>
+                      <a:round/>
+                      <a:headEnd type="none" w="med" len="med"/>
+                      <a:tailEnd type="none" w="med" len="med"/>
+                    </a:lnB>
+                    <a:solidFill>
+                      <a:srgbClr val="F5F7F9"/>
                     </a:solidFill>
                   </a:tcPr>
                 </a:tc>
@@ -12595,7 +14290,7 @@
       </p:graphicFrame>
       <p:sp>
         <p:nvSpPr>
-          <p:cNvPr id="8" name="Text 5"/>
+          <p:cNvPr id="57" name="Text 54"/>
           <p:cNvSpPr/>
           <p:nvPr/>
         </p:nvSpPr>
@@ -12634,7 +14329,7 @@
       </p:sp>
       <p:sp>
         <p:nvSpPr>
-          <p:cNvPr id="9" name="Text 6"/>
+          <p:cNvPr id="58" name="Text 55"/>
           <p:cNvSpPr/>
           <p:nvPr/>
         </p:nvSpPr>
